--- a/docs/pptx/entire/ritu-entire-linsubhr-ratio-anyhosp_10pct.pptx
+++ b/docs/pptx/entire/ritu-entire-linsubhr-ratio-anyhosp_10pct.pptx
@@ -3432,612 +3432,612 @@
           </p:nvSpPr>
           <p:spPr>
             <a:xfrm>
-              <a:off x="1172049" y="2988148"/>
-              <a:ext cx="7090630" cy="2323250"/>
+              <a:off x="1172049" y="2958512"/>
+              <a:ext cx="7090630" cy="2355901"/>
             </a:xfrm>
             <a:custGeom>
               <a:avLst/>
               <a:pathLst>
-                <a:path w="7090630" h="2323250">
+                <a:path w="7090630" h="2355901">
                   <a:moveTo>
                     <a:pt x="0" y="0"/>
                   </a:moveTo>
                   <a:lnTo>
-                    <a:pt x="71622" y="60179"/>
-                  </a:lnTo>
-                  <a:lnTo>
-                    <a:pt x="143245" y="118948"/>
-                  </a:lnTo>
-                  <a:lnTo>
-                    <a:pt x="214867" y="176341"/>
-                  </a:lnTo>
-                  <a:lnTo>
-                    <a:pt x="286490" y="232390"/>
-                  </a:lnTo>
-                  <a:lnTo>
-                    <a:pt x="358112" y="287125"/>
-                  </a:lnTo>
-                  <a:lnTo>
-                    <a:pt x="429735" y="340579"/>
-                  </a:lnTo>
-                  <a:lnTo>
-                    <a:pt x="501357" y="392780"/>
-                  </a:lnTo>
-                  <a:lnTo>
-                    <a:pt x="572980" y="443759"/>
-                  </a:lnTo>
-                  <a:lnTo>
-                    <a:pt x="644602" y="493543"/>
-                  </a:lnTo>
-                  <a:lnTo>
-                    <a:pt x="716225" y="542161"/>
-                  </a:lnTo>
-                  <a:lnTo>
-                    <a:pt x="787847" y="589641"/>
-                  </a:lnTo>
-                  <a:lnTo>
-                    <a:pt x="859470" y="636008"/>
-                  </a:lnTo>
-                  <a:lnTo>
-                    <a:pt x="931092" y="681289"/>
-                  </a:lnTo>
-                  <a:lnTo>
-                    <a:pt x="1002715" y="725510"/>
-                  </a:lnTo>
-                  <a:lnTo>
-                    <a:pt x="1074337" y="768694"/>
-                  </a:lnTo>
-                  <a:lnTo>
-                    <a:pt x="1145960" y="810867"/>
-                  </a:lnTo>
-                  <a:lnTo>
-                    <a:pt x="1217582" y="852053"/>
-                  </a:lnTo>
-                  <a:lnTo>
-                    <a:pt x="1289205" y="892273"/>
-                  </a:lnTo>
-                  <a:lnTo>
-                    <a:pt x="1360827" y="931551"/>
-                  </a:lnTo>
-                  <a:lnTo>
-                    <a:pt x="1432450" y="969910"/>
-                  </a:lnTo>
-                  <a:lnTo>
-                    <a:pt x="1504073" y="1007370"/>
-                  </a:lnTo>
-                  <a:lnTo>
-                    <a:pt x="1575695" y="1043952"/>
-                  </a:lnTo>
-                  <a:lnTo>
-                    <a:pt x="1647318" y="1079677"/>
-                  </a:lnTo>
-                  <a:lnTo>
-                    <a:pt x="1718940" y="1114566"/>
-                  </a:lnTo>
-                  <a:lnTo>
-                    <a:pt x="1790563" y="1148637"/>
-                  </a:lnTo>
-                  <a:lnTo>
-                    <a:pt x="1862185" y="1181910"/>
-                  </a:lnTo>
-                  <a:lnTo>
-                    <a:pt x="1933808" y="1214404"/>
-                  </a:lnTo>
-                  <a:lnTo>
-                    <a:pt x="2005430" y="1246137"/>
-                  </a:lnTo>
-                  <a:lnTo>
-                    <a:pt x="2077053" y="1277126"/>
-                  </a:lnTo>
-                  <a:lnTo>
-                    <a:pt x="2148675" y="1307390"/>
-                  </a:lnTo>
-                  <a:lnTo>
-                    <a:pt x="2220298" y="1336944"/>
-                  </a:lnTo>
-                  <a:lnTo>
-                    <a:pt x="2291920" y="1365807"/>
-                  </a:lnTo>
-                  <a:lnTo>
-                    <a:pt x="2363543" y="1393993"/>
-                  </a:lnTo>
-                  <a:lnTo>
-                    <a:pt x="2435165" y="1421519"/>
-                  </a:lnTo>
-                  <a:lnTo>
-                    <a:pt x="2506788" y="1448400"/>
-                  </a:lnTo>
-                  <a:lnTo>
-                    <a:pt x="2578410" y="1474651"/>
-                  </a:lnTo>
-                  <a:lnTo>
-                    <a:pt x="2650033" y="1500288"/>
-                  </a:lnTo>
-                  <a:lnTo>
-                    <a:pt x="2721655" y="1525324"/>
-                  </a:lnTo>
-                  <a:lnTo>
-                    <a:pt x="2793278" y="1549774"/>
-                  </a:lnTo>
-                  <a:lnTo>
-                    <a:pt x="2864901" y="1573651"/>
-                  </a:lnTo>
-                  <a:lnTo>
-                    <a:pt x="2936523" y="1596968"/>
-                  </a:lnTo>
-                  <a:lnTo>
-                    <a:pt x="3008146" y="1619740"/>
-                  </a:lnTo>
-                  <a:lnTo>
-                    <a:pt x="3079768" y="1641978"/>
-                  </a:lnTo>
-                  <a:lnTo>
-                    <a:pt x="3151391" y="1663695"/>
-                  </a:lnTo>
-                  <a:lnTo>
-                    <a:pt x="3223013" y="1684903"/>
-                  </a:lnTo>
-                  <a:lnTo>
-                    <a:pt x="3294636" y="1705615"/>
-                  </a:lnTo>
-                  <a:lnTo>
-                    <a:pt x="3366258" y="1725841"/>
-                  </a:lnTo>
-                  <a:lnTo>
-                    <a:pt x="3437881" y="1741849"/>
-                  </a:lnTo>
-                  <a:lnTo>
-                    <a:pt x="3509503" y="1749080"/>
-                  </a:lnTo>
-                  <a:lnTo>
-                    <a:pt x="3581126" y="1756249"/>
-                  </a:lnTo>
-                  <a:lnTo>
-                    <a:pt x="3652748" y="1763354"/>
-                  </a:lnTo>
-                  <a:lnTo>
-                    <a:pt x="3724371" y="1770398"/>
-                  </a:lnTo>
-                  <a:lnTo>
-                    <a:pt x="3795993" y="1777380"/>
-                  </a:lnTo>
-                  <a:lnTo>
-                    <a:pt x="3867616" y="1784301"/>
-                  </a:lnTo>
-                  <a:lnTo>
-                    <a:pt x="3939238" y="1791161"/>
-                  </a:lnTo>
-                  <a:lnTo>
-                    <a:pt x="4010861" y="1797962"/>
-                  </a:lnTo>
-                  <a:lnTo>
-                    <a:pt x="4082483" y="1804703"/>
-                  </a:lnTo>
-                  <a:lnTo>
-                    <a:pt x="4154106" y="1811385"/>
-                  </a:lnTo>
-                  <a:lnTo>
-                    <a:pt x="4225729" y="1818009"/>
-                  </a:lnTo>
-                  <a:lnTo>
-                    <a:pt x="4297351" y="1824574"/>
-                  </a:lnTo>
-                  <a:lnTo>
-                    <a:pt x="4368974" y="1831083"/>
-                  </a:lnTo>
-                  <a:lnTo>
-                    <a:pt x="4440596" y="1837534"/>
-                  </a:lnTo>
-                  <a:lnTo>
-                    <a:pt x="4512219" y="1843929"/>
-                  </a:lnTo>
-                  <a:lnTo>
-                    <a:pt x="4583841" y="1850269"/>
-                  </a:lnTo>
-                  <a:lnTo>
-                    <a:pt x="4655464" y="1856552"/>
-                  </a:lnTo>
-                  <a:lnTo>
-                    <a:pt x="4727086" y="1862781"/>
-                  </a:lnTo>
-                  <a:lnTo>
-                    <a:pt x="4798709" y="1868956"/>
-                  </a:lnTo>
-                  <a:lnTo>
-                    <a:pt x="4870331" y="1875076"/>
-                  </a:lnTo>
-                  <a:lnTo>
-                    <a:pt x="4941954" y="1881143"/>
-                  </a:lnTo>
-                  <a:lnTo>
-                    <a:pt x="5013576" y="1887157"/>
-                  </a:lnTo>
-                  <a:lnTo>
-                    <a:pt x="5085199" y="1893118"/>
-                  </a:lnTo>
-                  <a:lnTo>
-                    <a:pt x="5156821" y="1899028"/>
-                  </a:lnTo>
-                  <a:lnTo>
-                    <a:pt x="5228444" y="1904885"/>
-                  </a:lnTo>
-                  <a:lnTo>
-                    <a:pt x="5300066" y="1910691"/>
-                  </a:lnTo>
-                  <a:lnTo>
-                    <a:pt x="5371689" y="1916447"/>
-                  </a:lnTo>
-                  <a:lnTo>
-                    <a:pt x="5443311" y="1922152"/>
-                  </a:lnTo>
-                  <a:lnTo>
-                    <a:pt x="5514934" y="1927808"/>
-                  </a:lnTo>
-                  <a:lnTo>
-                    <a:pt x="5586557" y="1933414"/>
-                  </a:lnTo>
-                  <a:lnTo>
-                    <a:pt x="5658179" y="1938971"/>
-                  </a:lnTo>
-                  <a:lnTo>
-                    <a:pt x="5729802" y="1944479"/>
-                  </a:lnTo>
-                  <a:lnTo>
-                    <a:pt x="5801424" y="1949939"/>
-                  </a:lnTo>
-                  <a:lnTo>
-                    <a:pt x="5873047" y="1955352"/>
-                  </a:lnTo>
-                  <a:lnTo>
-                    <a:pt x="5944669" y="1960717"/>
-                  </a:lnTo>
-                  <a:lnTo>
-                    <a:pt x="6016292" y="1966035"/>
-                  </a:lnTo>
-                  <a:lnTo>
-                    <a:pt x="6087914" y="1971307"/>
-                  </a:lnTo>
-                  <a:lnTo>
-                    <a:pt x="6159537" y="1976533"/>
-                  </a:lnTo>
-                  <a:lnTo>
-                    <a:pt x="6231159" y="1981713"/>
-                  </a:lnTo>
-                  <a:lnTo>
-                    <a:pt x="6302782" y="1986848"/>
-                  </a:lnTo>
-                  <a:lnTo>
-                    <a:pt x="6374404" y="1991937"/>
-                  </a:lnTo>
-                  <a:lnTo>
-                    <a:pt x="6446027" y="1996983"/>
-                  </a:lnTo>
-                  <a:lnTo>
-                    <a:pt x="6517649" y="2001984"/>
-                  </a:lnTo>
-                  <a:lnTo>
-                    <a:pt x="6589272" y="2006942"/>
-                  </a:lnTo>
-                  <a:lnTo>
-                    <a:pt x="6660894" y="2011856"/>
-                  </a:lnTo>
-                  <a:lnTo>
-                    <a:pt x="6732517" y="2016727"/>
-                  </a:lnTo>
-                  <a:lnTo>
-                    <a:pt x="6804139" y="2021556"/>
-                  </a:lnTo>
-                  <a:lnTo>
-                    <a:pt x="6875762" y="2026342"/>
-                  </a:lnTo>
-                  <a:lnTo>
-                    <a:pt x="6947385" y="2031087"/>
-                  </a:lnTo>
-                  <a:lnTo>
-                    <a:pt x="7019007" y="2035790"/>
-                  </a:lnTo>
-                  <a:lnTo>
-                    <a:pt x="7090630" y="2040452"/>
-                  </a:lnTo>
-                  <a:lnTo>
-                    <a:pt x="7090630" y="2323250"/>
-                  </a:lnTo>
-                  <a:lnTo>
-                    <a:pt x="7019007" y="2317353"/>
-                  </a:lnTo>
-                  <a:lnTo>
-                    <a:pt x="6947385" y="2311315"/>
-                  </a:lnTo>
-                  <a:lnTo>
-                    <a:pt x="6875762" y="2305132"/>
-                  </a:lnTo>
-                  <a:lnTo>
-                    <a:pt x="6804139" y="2298800"/>
-                  </a:lnTo>
-                  <a:lnTo>
-                    <a:pt x="6732517" y="2292317"/>
-                  </a:lnTo>
-                  <a:lnTo>
-                    <a:pt x="6660894" y="2285678"/>
-                  </a:lnTo>
-                  <a:lnTo>
-                    <a:pt x="6589272" y="2278880"/>
-                  </a:lnTo>
-                  <a:lnTo>
-                    <a:pt x="6517649" y="2271918"/>
-                  </a:lnTo>
-                  <a:lnTo>
-                    <a:pt x="6446027" y="2264790"/>
-                  </a:lnTo>
-                  <a:lnTo>
-                    <a:pt x="6374404" y="2257491"/>
-                  </a:lnTo>
-                  <a:lnTo>
-                    <a:pt x="6302782" y="2250016"/>
-                  </a:lnTo>
-                  <a:lnTo>
-                    <a:pt x="6231159" y="2242363"/>
-                  </a:lnTo>
-                  <a:lnTo>
-                    <a:pt x="6159537" y="2234526"/>
-                  </a:lnTo>
-                  <a:lnTo>
-                    <a:pt x="6087914" y="2226501"/>
-                  </a:lnTo>
-                  <a:lnTo>
-                    <a:pt x="6016292" y="2218283"/>
-                  </a:lnTo>
-                  <a:lnTo>
-                    <a:pt x="5944669" y="2209868"/>
-                  </a:lnTo>
-                  <a:lnTo>
-                    <a:pt x="5873047" y="2201252"/>
-                  </a:lnTo>
-                  <a:lnTo>
-                    <a:pt x="5801424" y="2192428"/>
-                  </a:lnTo>
-                  <a:lnTo>
-                    <a:pt x="5729802" y="2183394"/>
-                  </a:lnTo>
-                  <a:lnTo>
-                    <a:pt x="5658179" y="2174142"/>
-                  </a:lnTo>
-                  <a:lnTo>
-                    <a:pt x="5586557" y="2164668"/>
-                  </a:lnTo>
-                  <a:lnTo>
-                    <a:pt x="5514934" y="2154968"/>
-                  </a:lnTo>
-                  <a:lnTo>
-                    <a:pt x="5443311" y="2145034"/>
-                  </a:lnTo>
-                  <a:lnTo>
-                    <a:pt x="5371689" y="2134863"/>
-                  </a:lnTo>
-                  <a:lnTo>
-                    <a:pt x="5300066" y="2124447"/>
-                  </a:lnTo>
-                  <a:lnTo>
-                    <a:pt x="5228444" y="2113781"/>
-                  </a:lnTo>
-                  <a:lnTo>
-                    <a:pt x="5156821" y="2102860"/>
-                  </a:lnTo>
-                  <a:lnTo>
-                    <a:pt x="5085199" y="2091677"/>
-                  </a:lnTo>
-                  <a:lnTo>
-                    <a:pt x="5013576" y="2080225"/>
-                  </a:lnTo>
-                  <a:lnTo>
-                    <a:pt x="4941954" y="2068499"/>
-                  </a:lnTo>
-                  <a:lnTo>
-                    <a:pt x="4870331" y="2056492"/>
-                  </a:lnTo>
-                  <a:lnTo>
-                    <a:pt x="4798709" y="2044196"/>
-                  </a:lnTo>
-                  <a:lnTo>
-                    <a:pt x="4727086" y="2031606"/>
-                  </a:lnTo>
-                  <a:lnTo>
-                    <a:pt x="4655464" y="2018713"/>
-                  </a:lnTo>
-                  <a:lnTo>
-                    <a:pt x="4583841" y="2005512"/>
-                  </a:lnTo>
-                  <a:lnTo>
-                    <a:pt x="4512219" y="1991994"/>
-                  </a:lnTo>
-                  <a:lnTo>
-                    <a:pt x="4440596" y="1978151"/>
-                  </a:lnTo>
-                  <a:lnTo>
-                    <a:pt x="4368974" y="1963977"/>
-                  </a:lnTo>
-                  <a:lnTo>
-                    <a:pt x="4297351" y="1949462"/>
-                  </a:lnTo>
-                  <a:lnTo>
-                    <a:pt x="4225729" y="1934599"/>
-                  </a:lnTo>
-                  <a:lnTo>
-                    <a:pt x="4154106" y="1919380"/>
-                  </a:lnTo>
-                  <a:lnTo>
-                    <a:pt x="4082483" y="1903796"/>
-                  </a:lnTo>
-                  <a:lnTo>
-                    <a:pt x="4010861" y="1887838"/>
-                  </a:lnTo>
-                  <a:lnTo>
-                    <a:pt x="3939238" y="1871497"/>
-                  </a:lnTo>
-                  <a:lnTo>
-                    <a:pt x="3867616" y="1854764"/>
-                  </a:lnTo>
-                  <a:lnTo>
-                    <a:pt x="3795993" y="1837630"/>
-                  </a:lnTo>
-                  <a:lnTo>
-                    <a:pt x="3724371" y="1820085"/>
-                  </a:lnTo>
-                  <a:lnTo>
-                    <a:pt x="3652748" y="1802119"/>
-                  </a:lnTo>
-                  <a:lnTo>
-                    <a:pt x="3581126" y="1783722"/>
-                  </a:lnTo>
-                  <a:lnTo>
-                    <a:pt x="3509503" y="1764884"/>
-                  </a:lnTo>
-                  <a:lnTo>
-                    <a:pt x="3437881" y="1745594"/>
-                  </a:lnTo>
-                  <a:lnTo>
-                    <a:pt x="3366258" y="1734553"/>
-                  </a:lnTo>
-                  <a:lnTo>
-                    <a:pt x="3294636" y="1727194"/>
-                  </a:lnTo>
-                  <a:lnTo>
-                    <a:pt x="3223013" y="1719769"/>
-                  </a:lnTo>
-                  <a:lnTo>
-                    <a:pt x="3151391" y="1712279"/>
-                  </a:lnTo>
-                  <a:lnTo>
-                    <a:pt x="3079768" y="1704723"/>
-                  </a:lnTo>
-                  <a:lnTo>
-                    <a:pt x="3008146" y="1697100"/>
-                  </a:lnTo>
-                  <a:lnTo>
-                    <a:pt x="2936523" y="1689410"/>
-                  </a:lnTo>
-                  <a:lnTo>
-                    <a:pt x="2864901" y="1681653"/>
-                  </a:lnTo>
-                  <a:lnTo>
-                    <a:pt x="2793278" y="1673826"/>
-                  </a:lnTo>
-                  <a:lnTo>
-                    <a:pt x="2721655" y="1665931"/>
-                  </a:lnTo>
-                  <a:lnTo>
-                    <a:pt x="2650033" y="1657966"/>
-                  </a:lnTo>
-                  <a:lnTo>
-                    <a:pt x="2578410" y="1649931"/>
-                  </a:lnTo>
-                  <a:lnTo>
-                    <a:pt x="2506788" y="1641825"/>
-                  </a:lnTo>
-                  <a:lnTo>
-                    <a:pt x="2435165" y="1633648"/>
-                  </a:lnTo>
-                  <a:lnTo>
-                    <a:pt x="2363543" y="1625398"/>
-                  </a:lnTo>
-                  <a:lnTo>
-                    <a:pt x="2291920" y="1617076"/>
-                  </a:lnTo>
-                  <a:lnTo>
-                    <a:pt x="2220298" y="1608680"/>
-                  </a:lnTo>
-                  <a:lnTo>
-                    <a:pt x="2148675" y="1600211"/>
-                  </a:lnTo>
-                  <a:lnTo>
-                    <a:pt x="2077053" y="1591666"/>
-                  </a:lnTo>
-                  <a:lnTo>
-                    <a:pt x="2005430" y="1583046"/>
-                  </a:lnTo>
-                  <a:lnTo>
-                    <a:pt x="1933808" y="1574351"/>
-                  </a:lnTo>
-                  <a:lnTo>
-                    <a:pt x="1862185" y="1565578"/>
-                  </a:lnTo>
-                  <a:lnTo>
-                    <a:pt x="1790563" y="1556728"/>
-                  </a:lnTo>
-                  <a:lnTo>
-                    <a:pt x="1718940" y="1547801"/>
-                  </a:lnTo>
-                  <a:lnTo>
-                    <a:pt x="1647318" y="1538794"/>
-                  </a:lnTo>
-                  <a:lnTo>
-                    <a:pt x="1575695" y="1529708"/>
-                  </a:lnTo>
-                  <a:lnTo>
-                    <a:pt x="1504073" y="1520542"/>
-                  </a:lnTo>
-                  <a:lnTo>
-                    <a:pt x="1432450" y="1511295"/>
-                  </a:lnTo>
-                  <a:lnTo>
-                    <a:pt x="1360827" y="1501966"/>
-                  </a:lnTo>
-                  <a:lnTo>
-                    <a:pt x="1289205" y="1492555"/>
-                  </a:lnTo>
-                  <a:lnTo>
-                    <a:pt x="1217582" y="1483062"/>
-                  </a:lnTo>
-                  <a:lnTo>
-                    <a:pt x="1145960" y="1473484"/>
-                  </a:lnTo>
-                  <a:lnTo>
-                    <a:pt x="1074337" y="1463822"/>
-                  </a:lnTo>
-                  <a:lnTo>
-                    <a:pt x="1002715" y="1454075"/>
-                  </a:lnTo>
-                  <a:lnTo>
-                    <a:pt x="931092" y="1444242"/>
-                  </a:lnTo>
-                  <a:lnTo>
-                    <a:pt x="859470" y="1434322"/>
-                  </a:lnTo>
-                  <a:lnTo>
-                    <a:pt x="787847" y="1424315"/>
-                  </a:lnTo>
-                  <a:lnTo>
-                    <a:pt x="716225" y="1414219"/>
-                  </a:lnTo>
-                  <a:lnTo>
-                    <a:pt x="644602" y="1404034"/>
-                  </a:lnTo>
-                  <a:lnTo>
-                    <a:pt x="572980" y="1393760"/>
-                  </a:lnTo>
-                  <a:lnTo>
-                    <a:pt x="501357" y="1383395"/>
-                  </a:lnTo>
-                  <a:lnTo>
-                    <a:pt x="429735" y="1372938"/>
-                  </a:lnTo>
-                  <a:lnTo>
-                    <a:pt x="358112" y="1362390"/>
-                  </a:lnTo>
-                  <a:lnTo>
-                    <a:pt x="286490" y="1351748"/>
-                  </a:lnTo>
-                  <a:lnTo>
-                    <a:pt x="214867" y="1341013"/>
-                  </a:lnTo>
-                  <a:lnTo>
-                    <a:pt x="143245" y="1330182"/>
-                  </a:lnTo>
-                  <a:lnTo>
-                    <a:pt x="71622" y="1319257"/>
-                  </a:lnTo>
-                  <a:lnTo>
-                    <a:pt x="0" y="1308235"/>
+                    <a:pt x="71622" y="61483"/>
+                  </a:lnTo>
+                  <a:lnTo>
+                    <a:pt x="143245" y="121512"/>
+                  </a:lnTo>
+                  <a:lnTo>
+                    <a:pt x="214867" y="180121"/>
+                  </a:lnTo>
+                  <a:lnTo>
+                    <a:pt x="286490" y="237343"/>
+                  </a:lnTo>
+                  <a:lnTo>
+                    <a:pt x="358112" y="293211"/>
+                  </a:lnTo>
+                  <a:lnTo>
+                    <a:pt x="429735" y="347758"/>
+                  </a:lnTo>
+                  <a:lnTo>
+                    <a:pt x="501357" y="401014"/>
+                  </a:lnTo>
+                  <a:lnTo>
+                    <a:pt x="572980" y="453010"/>
+                  </a:lnTo>
+                  <a:lnTo>
+                    <a:pt x="644602" y="503775"/>
+                  </a:lnTo>
+                  <a:lnTo>
+                    <a:pt x="716225" y="553340"/>
+                  </a:lnTo>
+                  <a:lnTo>
+                    <a:pt x="787847" y="601732"/>
+                  </a:lnTo>
+                  <a:lnTo>
+                    <a:pt x="859470" y="648979"/>
+                  </a:lnTo>
+                  <a:lnTo>
+                    <a:pt x="931092" y="695109"/>
+                  </a:lnTo>
+                  <a:lnTo>
+                    <a:pt x="1002715" y="740147"/>
+                  </a:lnTo>
+                  <a:lnTo>
+                    <a:pt x="1074337" y="784119"/>
+                  </a:lnTo>
+                  <a:lnTo>
+                    <a:pt x="1145960" y="827051"/>
+                  </a:lnTo>
+                  <a:lnTo>
+                    <a:pt x="1217582" y="868968"/>
+                  </a:lnTo>
+                  <a:lnTo>
+                    <a:pt x="1289205" y="909892"/>
+                  </a:lnTo>
+                  <a:lnTo>
+                    <a:pt x="1360827" y="949849"/>
+                  </a:lnTo>
+                  <a:lnTo>
+                    <a:pt x="1432450" y="988860"/>
+                  </a:lnTo>
+                  <a:lnTo>
+                    <a:pt x="1504073" y="1026948"/>
+                  </a:lnTo>
+                  <a:lnTo>
+                    <a:pt x="1575695" y="1064135"/>
+                  </a:lnTo>
+                  <a:lnTo>
+                    <a:pt x="1647318" y="1100442"/>
+                  </a:lnTo>
+                  <a:lnTo>
+                    <a:pt x="1718940" y="1135890"/>
+                  </a:lnTo>
+                  <a:lnTo>
+                    <a:pt x="1790563" y="1170500"/>
+                  </a:lnTo>
+                  <a:lnTo>
+                    <a:pt x="1862185" y="1204291"/>
+                  </a:lnTo>
+                  <a:lnTo>
+                    <a:pt x="1933808" y="1237282"/>
+                  </a:lnTo>
+                  <a:lnTo>
+                    <a:pt x="2005430" y="1269492"/>
+                  </a:lnTo>
+                  <a:lnTo>
+                    <a:pt x="2077053" y="1300941"/>
+                  </a:lnTo>
+                  <a:lnTo>
+                    <a:pt x="2148675" y="1331646"/>
+                  </a:lnTo>
+                  <a:lnTo>
+                    <a:pt x="2220298" y="1361624"/>
+                  </a:lnTo>
+                  <a:lnTo>
+                    <a:pt x="2291920" y="1390893"/>
+                  </a:lnTo>
+                  <a:lnTo>
+                    <a:pt x="2363543" y="1419469"/>
+                  </a:lnTo>
+                  <a:lnTo>
+                    <a:pt x="2435165" y="1447369"/>
+                  </a:lnTo>
+                  <a:lnTo>
+                    <a:pt x="2506788" y="1474610"/>
+                  </a:lnTo>
+                  <a:lnTo>
+                    <a:pt x="2578410" y="1501205"/>
+                  </a:lnTo>
+                  <a:lnTo>
+                    <a:pt x="2650033" y="1527172"/>
+                  </a:lnTo>
+                  <a:lnTo>
+                    <a:pt x="2721655" y="1552524"/>
+                  </a:lnTo>
+                  <a:lnTo>
+                    <a:pt x="2793278" y="1577277"/>
+                  </a:lnTo>
+                  <a:lnTo>
+                    <a:pt x="2864901" y="1601443"/>
+                  </a:lnTo>
+                  <a:lnTo>
+                    <a:pt x="2936523" y="1625038"/>
+                  </a:lnTo>
+                  <a:lnTo>
+                    <a:pt x="3008146" y="1648075"/>
+                  </a:lnTo>
+                  <a:lnTo>
+                    <a:pt x="3079768" y="1670567"/>
+                  </a:lnTo>
+                  <a:lnTo>
+                    <a:pt x="3151391" y="1692526"/>
+                  </a:lnTo>
+                  <a:lnTo>
+                    <a:pt x="3223013" y="1713966"/>
+                  </a:lnTo>
+                  <a:lnTo>
+                    <a:pt x="3294636" y="1734899"/>
+                  </a:lnTo>
+                  <a:lnTo>
+                    <a:pt x="3366258" y="1755337"/>
+                  </a:lnTo>
+                  <a:lnTo>
+                    <a:pt x="3437881" y="1771543"/>
+                  </a:lnTo>
+                  <a:lnTo>
+                    <a:pt x="3509503" y="1778964"/>
+                  </a:lnTo>
+                  <a:lnTo>
+                    <a:pt x="3581126" y="1786318"/>
+                  </a:lnTo>
+                  <a:lnTo>
+                    <a:pt x="3652748" y="1793606"/>
+                  </a:lnTo>
+                  <a:lnTo>
+                    <a:pt x="3724371" y="1800829"/>
+                  </a:lnTo>
+                  <a:lnTo>
+                    <a:pt x="3795993" y="1807987"/>
+                  </a:lnTo>
+                  <a:lnTo>
+                    <a:pt x="3867616" y="1815081"/>
+                  </a:lnTo>
+                  <a:lnTo>
+                    <a:pt x="3939238" y="1822111"/>
+                  </a:lnTo>
+                  <a:lnTo>
+                    <a:pt x="4010861" y="1829078"/>
+                  </a:lnTo>
+                  <a:lnTo>
+                    <a:pt x="4082483" y="1835982"/>
+                  </a:lnTo>
+                  <a:lnTo>
+                    <a:pt x="4154106" y="1842825"/>
+                  </a:lnTo>
+                  <a:lnTo>
+                    <a:pt x="4225729" y="1849606"/>
+                  </a:lnTo>
+                  <a:lnTo>
+                    <a:pt x="4297351" y="1856326"/>
+                  </a:lnTo>
+                  <a:lnTo>
+                    <a:pt x="4368974" y="1862986"/>
+                  </a:lnTo>
+                  <a:lnTo>
+                    <a:pt x="4440596" y="1869587"/>
+                  </a:lnTo>
+                  <a:lnTo>
+                    <a:pt x="4512219" y="1876128"/>
+                  </a:lnTo>
+                  <a:lnTo>
+                    <a:pt x="4583841" y="1882610"/>
+                  </a:lnTo>
+                  <a:lnTo>
+                    <a:pt x="4655464" y="1889034"/>
+                  </a:lnTo>
+                  <a:lnTo>
+                    <a:pt x="4727086" y="1895401"/>
+                  </a:lnTo>
+                  <a:lnTo>
+                    <a:pt x="4798709" y="1901711"/>
+                  </a:lnTo>
+                  <a:lnTo>
+                    <a:pt x="4870331" y="1907963"/>
+                  </a:lnTo>
+                  <a:lnTo>
+                    <a:pt x="4941954" y="1914160"/>
+                  </a:lnTo>
+                  <a:lnTo>
+                    <a:pt x="5013576" y="1920301"/>
+                  </a:lnTo>
+                  <a:lnTo>
+                    <a:pt x="5085199" y="1926388"/>
+                  </a:lnTo>
+                  <a:lnTo>
+                    <a:pt x="5156821" y="1932419"/>
+                  </a:lnTo>
+                  <a:lnTo>
+                    <a:pt x="5228444" y="1938397"/>
+                  </a:lnTo>
+                  <a:lnTo>
+                    <a:pt x="5300066" y="1944320"/>
+                  </a:lnTo>
+                  <a:lnTo>
+                    <a:pt x="5371689" y="1950191"/>
+                  </a:lnTo>
+                  <a:lnTo>
+                    <a:pt x="5443311" y="1956009"/>
+                  </a:lnTo>
+                  <a:lnTo>
+                    <a:pt x="5514934" y="1961775"/>
+                  </a:lnTo>
+                  <a:lnTo>
+                    <a:pt x="5586557" y="1967489"/>
+                  </a:lnTo>
+                  <a:lnTo>
+                    <a:pt x="5658179" y="1973152"/>
+                  </a:lnTo>
+                  <a:lnTo>
+                    <a:pt x="5729802" y="1978764"/>
+                  </a:lnTo>
+                  <a:lnTo>
+                    <a:pt x="5801424" y="1984326"/>
+                  </a:lnTo>
+                  <a:lnTo>
+                    <a:pt x="5873047" y="1989837"/>
+                  </a:lnTo>
+                  <a:lnTo>
+                    <a:pt x="5944669" y="1995300"/>
+                  </a:lnTo>
+                  <a:lnTo>
+                    <a:pt x="6016292" y="2000713"/>
+                  </a:lnTo>
+                  <a:lnTo>
+                    <a:pt x="6087914" y="2006078"/>
+                  </a:lnTo>
+                  <a:lnTo>
+                    <a:pt x="6159537" y="2011394"/>
+                  </a:lnTo>
+                  <a:lnTo>
+                    <a:pt x="6231159" y="2016663"/>
+                  </a:lnTo>
+                  <a:lnTo>
+                    <a:pt x="6302782" y="2021885"/>
+                  </a:lnTo>
+                  <a:lnTo>
+                    <a:pt x="6374404" y="2027060"/>
+                  </a:lnTo>
+                  <a:lnTo>
+                    <a:pt x="6446027" y="2032188"/>
+                  </a:lnTo>
+                  <a:lnTo>
+                    <a:pt x="6517649" y="2037271"/>
+                  </a:lnTo>
+                  <a:lnTo>
+                    <a:pt x="6589272" y="2042308"/>
+                  </a:lnTo>
+                  <a:lnTo>
+                    <a:pt x="6660894" y="2047299"/>
+                  </a:lnTo>
+                  <a:lnTo>
+                    <a:pt x="6732517" y="2052246"/>
+                  </a:lnTo>
+                  <a:lnTo>
+                    <a:pt x="6804139" y="2057149"/>
+                  </a:lnTo>
+                  <a:lnTo>
+                    <a:pt x="6875762" y="2062007"/>
+                  </a:lnTo>
+                  <a:lnTo>
+                    <a:pt x="6947385" y="2066822"/>
+                  </a:lnTo>
+                  <a:lnTo>
+                    <a:pt x="7019007" y="2071594"/>
+                  </a:lnTo>
+                  <a:lnTo>
+                    <a:pt x="7090630" y="2076323"/>
+                  </a:lnTo>
+                  <a:lnTo>
+                    <a:pt x="7090630" y="2355901"/>
+                  </a:lnTo>
+                  <a:lnTo>
+                    <a:pt x="7019007" y="2350017"/>
+                  </a:lnTo>
+                  <a:lnTo>
+                    <a:pt x="6947385" y="2343990"/>
+                  </a:lnTo>
+                  <a:lnTo>
+                    <a:pt x="6875762" y="2337817"/>
+                  </a:lnTo>
+                  <a:lnTo>
+                    <a:pt x="6804139" y="2331494"/>
+                  </a:lnTo>
+                  <a:lnTo>
+                    <a:pt x="6732517" y="2325018"/>
+                  </a:lnTo>
+                  <a:lnTo>
+                    <a:pt x="6660894" y="2318385"/>
+                  </a:lnTo>
+                  <a:lnTo>
+                    <a:pt x="6589272" y="2311592"/>
+                  </a:lnTo>
+                  <a:lnTo>
+                    <a:pt x="6517649" y="2304634"/>
+                  </a:lnTo>
+                  <a:lnTo>
+                    <a:pt x="6446027" y="2297507"/>
+                  </a:lnTo>
+                  <a:lnTo>
+                    <a:pt x="6374404" y="2290207"/>
+                  </a:lnTo>
+                  <a:lnTo>
+                    <a:pt x="6302782" y="2282731"/>
+                  </a:lnTo>
+                  <a:lnTo>
+                    <a:pt x="6231159" y="2275073"/>
+                  </a:lnTo>
+                  <a:lnTo>
+                    <a:pt x="6159537" y="2267230"/>
+                  </a:lnTo>
+                  <a:lnTo>
+                    <a:pt x="6087914" y="2259197"/>
+                  </a:lnTo>
+                  <a:lnTo>
+                    <a:pt x="6016292" y="2250969"/>
+                  </a:lnTo>
+                  <a:lnTo>
+                    <a:pt x="5944669" y="2242542"/>
+                  </a:lnTo>
+                  <a:lnTo>
+                    <a:pt x="5873047" y="2233910"/>
+                  </a:lnTo>
+                  <a:lnTo>
+                    <a:pt x="5801424" y="2225070"/>
+                  </a:lnTo>
+                  <a:lnTo>
+                    <a:pt x="5729802" y="2216015"/>
+                  </a:lnTo>
+                  <a:lnTo>
+                    <a:pt x="5658179" y="2206741"/>
+                  </a:lnTo>
+                  <a:lnTo>
+                    <a:pt x="5586557" y="2197242"/>
+                  </a:lnTo>
+                  <a:lnTo>
+                    <a:pt x="5514934" y="2187512"/>
+                  </a:lnTo>
+                  <a:lnTo>
+                    <a:pt x="5443311" y="2177547"/>
+                  </a:lnTo>
+                  <a:lnTo>
+                    <a:pt x="5371689" y="2167341"/>
+                  </a:lnTo>
+                  <a:lnTo>
+                    <a:pt x="5300066" y="2156887"/>
+                  </a:lnTo>
+                  <a:lnTo>
+                    <a:pt x="5228444" y="2146180"/>
+                  </a:lnTo>
+                  <a:lnTo>
+                    <a:pt x="5156821" y="2135214"/>
+                  </a:lnTo>
+                  <a:lnTo>
+                    <a:pt x="5085199" y="2123982"/>
+                  </a:lnTo>
+                  <a:lnTo>
+                    <a:pt x="5013576" y="2112477"/>
+                  </a:lnTo>
+                  <a:lnTo>
+                    <a:pt x="4941954" y="2100694"/>
+                  </a:lnTo>
+                  <a:lnTo>
+                    <a:pt x="4870331" y="2088625"/>
+                  </a:lnTo>
+                  <a:lnTo>
+                    <a:pt x="4798709" y="2076264"/>
+                  </a:lnTo>
+                  <a:lnTo>
+                    <a:pt x="4727086" y="2063603"/>
+                  </a:lnTo>
+                  <a:lnTo>
+                    <a:pt x="4655464" y="2050636"/>
+                  </a:lnTo>
+                  <a:lnTo>
+                    <a:pt x="4583841" y="2037354"/>
+                  </a:lnTo>
+                  <a:lnTo>
+                    <a:pt x="4512219" y="2023750"/>
+                  </a:lnTo>
+                  <a:lnTo>
+                    <a:pt x="4440596" y="2009817"/>
+                  </a:lnTo>
+                  <a:lnTo>
+                    <a:pt x="4368974" y="1995546"/>
+                  </a:lnTo>
+                  <a:lnTo>
+                    <a:pt x="4297351" y="1980929"/>
+                  </a:lnTo>
+                  <a:lnTo>
+                    <a:pt x="4225729" y="1965958"/>
+                  </a:lnTo>
+                  <a:lnTo>
+                    <a:pt x="4154106" y="1950625"/>
+                  </a:lnTo>
+                  <a:lnTo>
+                    <a:pt x="4082483" y="1934919"/>
+                  </a:lnTo>
+                  <a:lnTo>
+                    <a:pt x="4010861" y="1918833"/>
+                  </a:lnTo>
+                  <a:lnTo>
+                    <a:pt x="3939238" y="1902358"/>
+                  </a:lnTo>
+                  <a:lnTo>
+                    <a:pt x="3867616" y="1885483"/>
+                  </a:lnTo>
+                  <a:lnTo>
+                    <a:pt x="3795993" y="1868199"/>
+                  </a:lnTo>
+                  <a:lnTo>
+                    <a:pt x="3724371" y="1850496"/>
+                  </a:lnTo>
+                  <a:lnTo>
+                    <a:pt x="3652748" y="1832365"/>
+                  </a:lnTo>
+                  <a:lnTo>
+                    <a:pt x="3581126" y="1813794"/>
+                  </a:lnTo>
+                  <a:lnTo>
+                    <a:pt x="3509503" y="1794773"/>
+                  </a:lnTo>
+                  <a:lnTo>
+                    <a:pt x="3437881" y="1775291"/>
+                  </a:lnTo>
+                  <a:lnTo>
+                    <a:pt x="3366258" y="1764056"/>
+                  </a:lnTo>
+                  <a:lnTo>
+                    <a:pt x="3294636" y="1756500"/>
+                  </a:lnTo>
+                  <a:lnTo>
+                    <a:pt x="3223013" y="1748876"/>
+                  </a:lnTo>
+                  <a:lnTo>
+                    <a:pt x="3151391" y="1741183"/>
+                  </a:lnTo>
+                  <a:lnTo>
+                    <a:pt x="3079768" y="1733421"/>
+                  </a:lnTo>
+                  <a:lnTo>
+                    <a:pt x="3008146" y="1725588"/>
+                  </a:lnTo>
+                  <a:lnTo>
+                    <a:pt x="2936523" y="1717684"/>
+                  </a:lnTo>
+                  <a:lnTo>
+                    <a:pt x="2864901" y="1709709"/>
+                  </a:lnTo>
+                  <a:lnTo>
+                    <a:pt x="2793278" y="1701661"/>
+                  </a:lnTo>
+                  <a:lnTo>
+                    <a:pt x="2721655" y="1693541"/>
+                  </a:lnTo>
+                  <a:lnTo>
+                    <a:pt x="2650033" y="1685347"/>
+                  </a:lnTo>
+                  <a:lnTo>
+                    <a:pt x="2578410" y="1677079"/>
+                  </a:lnTo>
+                  <a:lnTo>
+                    <a:pt x="2506788" y="1668736"/>
+                  </a:lnTo>
+                  <a:lnTo>
+                    <a:pt x="2435165" y="1660317"/>
+                  </a:lnTo>
+                  <a:lnTo>
+                    <a:pt x="2363543" y="1651823"/>
+                  </a:lnTo>
+                  <a:lnTo>
+                    <a:pt x="2291920" y="1643251"/>
+                  </a:lnTo>
+                  <a:lnTo>
+                    <a:pt x="2220298" y="1634602"/>
+                  </a:lnTo>
+                  <a:lnTo>
+                    <a:pt x="2148675" y="1625875"/>
+                  </a:lnTo>
+                  <a:lnTo>
+                    <a:pt x="2077053" y="1617068"/>
+                  </a:lnTo>
+                  <a:lnTo>
+                    <a:pt x="2005430" y="1608182"/>
+                  </a:lnTo>
+                  <a:lnTo>
+                    <a:pt x="1933808" y="1599216"/>
+                  </a:lnTo>
+                  <a:lnTo>
+                    <a:pt x="1862185" y="1590168"/>
+                  </a:lnTo>
+                  <a:lnTo>
+                    <a:pt x="1790563" y="1581038"/>
+                  </a:lnTo>
+                  <a:lnTo>
+                    <a:pt x="1718940" y="1571826"/>
+                  </a:lnTo>
+                  <a:lnTo>
+                    <a:pt x="1647318" y="1562530"/>
+                  </a:lnTo>
+                  <a:lnTo>
+                    <a:pt x="1575695" y="1553151"/>
+                  </a:lnTo>
+                  <a:lnTo>
+                    <a:pt x="1504073" y="1543686"/>
+                  </a:lnTo>
+                  <a:lnTo>
+                    <a:pt x="1432450" y="1534135"/>
+                  </a:lnTo>
+                  <a:lnTo>
+                    <a:pt x="1360827" y="1524499"/>
+                  </a:lnTo>
+                  <a:lnTo>
+                    <a:pt x="1289205" y="1514775"/>
+                  </a:lnTo>
+                  <a:lnTo>
+                    <a:pt x="1217582" y="1504963"/>
+                  </a:lnTo>
+                  <a:lnTo>
+                    <a:pt x="1145960" y="1495062"/>
+                  </a:lnTo>
+                  <a:lnTo>
+                    <a:pt x="1074337" y="1485071"/>
+                  </a:lnTo>
+                  <a:lnTo>
+                    <a:pt x="1002715" y="1474990"/>
+                  </a:lnTo>
+                  <a:lnTo>
+                    <a:pt x="931092" y="1464818"/>
+                  </a:lnTo>
+                  <a:lnTo>
+                    <a:pt x="859470" y="1454554"/>
+                  </a:lnTo>
+                  <a:lnTo>
+                    <a:pt x="787847" y="1444196"/>
+                  </a:lnTo>
+                  <a:lnTo>
+                    <a:pt x="716225" y="1433745"/>
+                  </a:lnTo>
+                  <a:lnTo>
+                    <a:pt x="644602" y="1423200"/>
+                  </a:lnTo>
+                  <a:lnTo>
+                    <a:pt x="572980" y="1412559"/>
+                  </a:lnTo>
+                  <a:lnTo>
+                    <a:pt x="501357" y="1401822"/>
+                  </a:lnTo>
+                  <a:lnTo>
+                    <a:pt x="429735" y="1390987"/>
+                  </a:lnTo>
+                  <a:lnTo>
+                    <a:pt x="358112" y="1380054"/>
+                  </a:lnTo>
+                  <a:lnTo>
+                    <a:pt x="286490" y="1369023"/>
+                  </a:lnTo>
+                  <a:lnTo>
+                    <a:pt x="214867" y="1357891"/>
+                  </a:lnTo>
+                  <a:lnTo>
+                    <a:pt x="143245" y="1346659"/>
+                  </a:lnTo>
+                  <a:lnTo>
+                    <a:pt x="71622" y="1335325"/>
+                  </a:lnTo>
+                  <a:lnTo>
+                    <a:pt x="0" y="1323889"/>
                   </a:lnTo>
                   <a:close/>
                 </a:path>
@@ -4063,312 +4063,312 @@
           </p:nvSpPr>
           <p:spPr>
             <a:xfrm>
-              <a:off x="1172049" y="2988148"/>
-              <a:ext cx="7090630" cy="2040452"/>
+              <a:off x="1172049" y="2958512"/>
+              <a:ext cx="7090630" cy="2076323"/>
             </a:xfrm>
             <a:custGeom>
               <a:avLst/>
               <a:pathLst>
-                <a:path w="7090630" h="2040452">
+                <a:path w="7090630" h="2076323">
                   <a:moveTo>
                     <a:pt x="0" y="0"/>
                   </a:moveTo>
                   <a:lnTo>
-                    <a:pt x="71622" y="60179"/>
-                  </a:lnTo>
-                  <a:lnTo>
-                    <a:pt x="143245" y="118948"/>
-                  </a:lnTo>
-                  <a:lnTo>
-                    <a:pt x="214867" y="176341"/>
-                  </a:lnTo>
-                  <a:lnTo>
-                    <a:pt x="286490" y="232390"/>
-                  </a:lnTo>
-                  <a:lnTo>
-                    <a:pt x="358112" y="287125"/>
-                  </a:lnTo>
-                  <a:lnTo>
-                    <a:pt x="429735" y="340579"/>
-                  </a:lnTo>
-                  <a:lnTo>
-                    <a:pt x="501357" y="392780"/>
-                  </a:lnTo>
-                  <a:lnTo>
-                    <a:pt x="572980" y="443759"/>
-                  </a:lnTo>
-                  <a:lnTo>
-                    <a:pt x="644602" y="493543"/>
-                  </a:lnTo>
-                  <a:lnTo>
-                    <a:pt x="716225" y="542161"/>
-                  </a:lnTo>
-                  <a:lnTo>
-                    <a:pt x="787847" y="589641"/>
-                  </a:lnTo>
-                  <a:lnTo>
-                    <a:pt x="859470" y="636008"/>
-                  </a:lnTo>
-                  <a:lnTo>
-                    <a:pt x="931092" y="681289"/>
-                  </a:lnTo>
-                  <a:lnTo>
-                    <a:pt x="1002715" y="725510"/>
-                  </a:lnTo>
-                  <a:lnTo>
-                    <a:pt x="1074337" y="768694"/>
-                  </a:lnTo>
-                  <a:lnTo>
-                    <a:pt x="1145960" y="810867"/>
-                  </a:lnTo>
-                  <a:lnTo>
-                    <a:pt x="1217582" y="852053"/>
-                  </a:lnTo>
-                  <a:lnTo>
-                    <a:pt x="1289205" y="892273"/>
-                  </a:lnTo>
-                  <a:lnTo>
-                    <a:pt x="1360827" y="931551"/>
-                  </a:lnTo>
-                  <a:lnTo>
-                    <a:pt x="1432450" y="969910"/>
-                  </a:lnTo>
-                  <a:lnTo>
-                    <a:pt x="1504073" y="1007370"/>
-                  </a:lnTo>
-                  <a:lnTo>
-                    <a:pt x="1575695" y="1043952"/>
-                  </a:lnTo>
-                  <a:lnTo>
-                    <a:pt x="1647318" y="1079677"/>
-                  </a:lnTo>
-                  <a:lnTo>
-                    <a:pt x="1718940" y="1114566"/>
-                  </a:lnTo>
-                  <a:lnTo>
-                    <a:pt x="1790563" y="1148637"/>
-                  </a:lnTo>
-                  <a:lnTo>
-                    <a:pt x="1862185" y="1181910"/>
-                  </a:lnTo>
-                  <a:lnTo>
-                    <a:pt x="1933808" y="1214404"/>
-                  </a:lnTo>
-                  <a:lnTo>
-                    <a:pt x="2005430" y="1246137"/>
-                  </a:lnTo>
-                  <a:lnTo>
-                    <a:pt x="2077053" y="1277126"/>
-                  </a:lnTo>
-                  <a:lnTo>
-                    <a:pt x="2148675" y="1307390"/>
-                  </a:lnTo>
-                  <a:lnTo>
-                    <a:pt x="2220298" y="1336944"/>
-                  </a:lnTo>
-                  <a:lnTo>
-                    <a:pt x="2291920" y="1365807"/>
-                  </a:lnTo>
-                  <a:lnTo>
-                    <a:pt x="2363543" y="1393993"/>
-                  </a:lnTo>
-                  <a:lnTo>
-                    <a:pt x="2435165" y="1421519"/>
-                  </a:lnTo>
-                  <a:lnTo>
-                    <a:pt x="2506788" y="1448400"/>
-                  </a:lnTo>
-                  <a:lnTo>
-                    <a:pt x="2578410" y="1474651"/>
-                  </a:lnTo>
-                  <a:lnTo>
-                    <a:pt x="2650033" y="1500288"/>
-                  </a:lnTo>
-                  <a:lnTo>
-                    <a:pt x="2721655" y="1525324"/>
-                  </a:lnTo>
-                  <a:lnTo>
-                    <a:pt x="2793278" y="1549774"/>
-                  </a:lnTo>
-                  <a:lnTo>
-                    <a:pt x="2864901" y="1573651"/>
-                  </a:lnTo>
-                  <a:lnTo>
-                    <a:pt x="2936523" y="1596968"/>
-                  </a:lnTo>
-                  <a:lnTo>
-                    <a:pt x="3008146" y="1619740"/>
-                  </a:lnTo>
-                  <a:lnTo>
-                    <a:pt x="3079768" y="1641978"/>
-                  </a:lnTo>
-                  <a:lnTo>
-                    <a:pt x="3151391" y="1663695"/>
-                  </a:lnTo>
-                  <a:lnTo>
-                    <a:pt x="3223013" y="1684903"/>
-                  </a:lnTo>
-                  <a:lnTo>
-                    <a:pt x="3294636" y="1705615"/>
-                  </a:lnTo>
-                  <a:lnTo>
-                    <a:pt x="3366258" y="1725841"/>
-                  </a:lnTo>
-                  <a:lnTo>
-                    <a:pt x="3437881" y="1741849"/>
-                  </a:lnTo>
-                  <a:lnTo>
-                    <a:pt x="3509503" y="1749080"/>
-                  </a:lnTo>
-                  <a:lnTo>
-                    <a:pt x="3581126" y="1756249"/>
-                  </a:lnTo>
-                  <a:lnTo>
-                    <a:pt x="3652748" y="1763354"/>
-                  </a:lnTo>
-                  <a:lnTo>
-                    <a:pt x="3724371" y="1770398"/>
-                  </a:lnTo>
-                  <a:lnTo>
-                    <a:pt x="3795993" y="1777380"/>
-                  </a:lnTo>
-                  <a:lnTo>
-                    <a:pt x="3867616" y="1784301"/>
-                  </a:lnTo>
-                  <a:lnTo>
-                    <a:pt x="3939238" y="1791161"/>
-                  </a:lnTo>
-                  <a:lnTo>
-                    <a:pt x="4010861" y="1797962"/>
-                  </a:lnTo>
-                  <a:lnTo>
-                    <a:pt x="4082483" y="1804703"/>
-                  </a:lnTo>
-                  <a:lnTo>
-                    <a:pt x="4154106" y="1811385"/>
-                  </a:lnTo>
-                  <a:lnTo>
-                    <a:pt x="4225729" y="1818009"/>
-                  </a:lnTo>
-                  <a:lnTo>
-                    <a:pt x="4297351" y="1824574"/>
-                  </a:lnTo>
-                  <a:lnTo>
-                    <a:pt x="4368974" y="1831083"/>
-                  </a:lnTo>
-                  <a:lnTo>
-                    <a:pt x="4440596" y="1837534"/>
-                  </a:lnTo>
-                  <a:lnTo>
-                    <a:pt x="4512219" y="1843929"/>
-                  </a:lnTo>
-                  <a:lnTo>
-                    <a:pt x="4583841" y="1850269"/>
-                  </a:lnTo>
-                  <a:lnTo>
-                    <a:pt x="4655464" y="1856552"/>
-                  </a:lnTo>
-                  <a:lnTo>
-                    <a:pt x="4727086" y="1862781"/>
-                  </a:lnTo>
-                  <a:lnTo>
-                    <a:pt x="4798709" y="1868956"/>
-                  </a:lnTo>
-                  <a:lnTo>
-                    <a:pt x="4870331" y="1875076"/>
-                  </a:lnTo>
-                  <a:lnTo>
-                    <a:pt x="4941954" y="1881143"/>
-                  </a:lnTo>
-                  <a:lnTo>
-                    <a:pt x="5013576" y="1887157"/>
-                  </a:lnTo>
-                  <a:lnTo>
-                    <a:pt x="5085199" y="1893118"/>
-                  </a:lnTo>
-                  <a:lnTo>
-                    <a:pt x="5156821" y="1899028"/>
-                  </a:lnTo>
-                  <a:lnTo>
-                    <a:pt x="5228444" y="1904885"/>
-                  </a:lnTo>
-                  <a:lnTo>
-                    <a:pt x="5300066" y="1910691"/>
-                  </a:lnTo>
-                  <a:lnTo>
-                    <a:pt x="5371689" y="1916447"/>
-                  </a:lnTo>
-                  <a:lnTo>
-                    <a:pt x="5443311" y="1922152"/>
-                  </a:lnTo>
-                  <a:lnTo>
-                    <a:pt x="5514934" y="1927808"/>
-                  </a:lnTo>
-                  <a:lnTo>
-                    <a:pt x="5586557" y="1933414"/>
-                  </a:lnTo>
-                  <a:lnTo>
-                    <a:pt x="5658179" y="1938971"/>
-                  </a:lnTo>
-                  <a:lnTo>
-                    <a:pt x="5729802" y="1944479"/>
-                  </a:lnTo>
-                  <a:lnTo>
-                    <a:pt x="5801424" y="1949939"/>
-                  </a:lnTo>
-                  <a:lnTo>
-                    <a:pt x="5873047" y="1955352"/>
-                  </a:lnTo>
-                  <a:lnTo>
-                    <a:pt x="5944669" y="1960717"/>
-                  </a:lnTo>
-                  <a:lnTo>
-                    <a:pt x="6016292" y="1966035"/>
-                  </a:lnTo>
-                  <a:lnTo>
-                    <a:pt x="6087914" y="1971307"/>
-                  </a:lnTo>
-                  <a:lnTo>
-                    <a:pt x="6159537" y="1976533"/>
-                  </a:lnTo>
-                  <a:lnTo>
-                    <a:pt x="6231159" y="1981713"/>
-                  </a:lnTo>
-                  <a:lnTo>
-                    <a:pt x="6302782" y="1986848"/>
-                  </a:lnTo>
-                  <a:lnTo>
-                    <a:pt x="6374404" y="1991937"/>
-                  </a:lnTo>
-                  <a:lnTo>
-                    <a:pt x="6446027" y="1996983"/>
-                  </a:lnTo>
-                  <a:lnTo>
-                    <a:pt x="6517649" y="2001984"/>
-                  </a:lnTo>
-                  <a:lnTo>
-                    <a:pt x="6589272" y="2006942"/>
-                  </a:lnTo>
-                  <a:lnTo>
-                    <a:pt x="6660894" y="2011856"/>
-                  </a:lnTo>
-                  <a:lnTo>
-                    <a:pt x="6732517" y="2016727"/>
-                  </a:lnTo>
-                  <a:lnTo>
-                    <a:pt x="6804139" y="2021556"/>
-                  </a:lnTo>
-                  <a:lnTo>
-                    <a:pt x="6875762" y="2026342"/>
-                  </a:lnTo>
-                  <a:lnTo>
-                    <a:pt x="6947385" y="2031087"/>
-                  </a:lnTo>
-                  <a:lnTo>
-                    <a:pt x="7019007" y="2035790"/>
-                  </a:lnTo>
-                  <a:lnTo>
-                    <a:pt x="7090630" y="2040452"/>
+                    <a:pt x="71622" y="61483"/>
+                  </a:lnTo>
+                  <a:lnTo>
+                    <a:pt x="143245" y="121512"/>
+                  </a:lnTo>
+                  <a:lnTo>
+                    <a:pt x="214867" y="180121"/>
+                  </a:lnTo>
+                  <a:lnTo>
+                    <a:pt x="286490" y="237343"/>
+                  </a:lnTo>
+                  <a:lnTo>
+                    <a:pt x="358112" y="293211"/>
+                  </a:lnTo>
+                  <a:lnTo>
+                    <a:pt x="429735" y="347758"/>
+                  </a:lnTo>
+                  <a:lnTo>
+                    <a:pt x="501357" y="401014"/>
+                  </a:lnTo>
+                  <a:lnTo>
+                    <a:pt x="572980" y="453010"/>
+                  </a:lnTo>
+                  <a:lnTo>
+                    <a:pt x="644602" y="503775"/>
+                  </a:lnTo>
+                  <a:lnTo>
+                    <a:pt x="716225" y="553340"/>
+                  </a:lnTo>
+                  <a:lnTo>
+                    <a:pt x="787847" y="601732"/>
+                  </a:lnTo>
+                  <a:lnTo>
+                    <a:pt x="859470" y="648979"/>
+                  </a:lnTo>
+                  <a:lnTo>
+                    <a:pt x="931092" y="695109"/>
+                  </a:lnTo>
+                  <a:lnTo>
+                    <a:pt x="1002715" y="740147"/>
+                  </a:lnTo>
+                  <a:lnTo>
+                    <a:pt x="1074337" y="784119"/>
+                  </a:lnTo>
+                  <a:lnTo>
+                    <a:pt x="1145960" y="827051"/>
+                  </a:lnTo>
+                  <a:lnTo>
+                    <a:pt x="1217582" y="868968"/>
+                  </a:lnTo>
+                  <a:lnTo>
+                    <a:pt x="1289205" y="909892"/>
+                  </a:lnTo>
+                  <a:lnTo>
+                    <a:pt x="1360827" y="949849"/>
+                  </a:lnTo>
+                  <a:lnTo>
+                    <a:pt x="1432450" y="988860"/>
+                  </a:lnTo>
+                  <a:lnTo>
+                    <a:pt x="1504073" y="1026948"/>
+                  </a:lnTo>
+                  <a:lnTo>
+                    <a:pt x="1575695" y="1064135"/>
+                  </a:lnTo>
+                  <a:lnTo>
+                    <a:pt x="1647318" y="1100442"/>
+                  </a:lnTo>
+                  <a:lnTo>
+                    <a:pt x="1718940" y="1135890"/>
+                  </a:lnTo>
+                  <a:lnTo>
+                    <a:pt x="1790563" y="1170500"/>
+                  </a:lnTo>
+                  <a:lnTo>
+                    <a:pt x="1862185" y="1204291"/>
+                  </a:lnTo>
+                  <a:lnTo>
+                    <a:pt x="1933808" y="1237282"/>
+                  </a:lnTo>
+                  <a:lnTo>
+                    <a:pt x="2005430" y="1269492"/>
+                  </a:lnTo>
+                  <a:lnTo>
+                    <a:pt x="2077053" y="1300941"/>
+                  </a:lnTo>
+                  <a:lnTo>
+                    <a:pt x="2148675" y="1331646"/>
+                  </a:lnTo>
+                  <a:lnTo>
+                    <a:pt x="2220298" y="1361624"/>
+                  </a:lnTo>
+                  <a:lnTo>
+                    <a:pt x="2291920" y="1390893"/>
+                  </a:lnTo>
+                  <a:lnTo>
+                    <a:pt x="2363543" y="1419469"/>
+                  </a:lnTo>
+                  <a:lnTo>
+                    <a:pt x="2435165" y="1447369"/>
+                  </a:lnTo>
+                  <a:lnTo>
+                    <a:pt x="2506788" y="1474610"/>
+                  </a:lnTo>
+                  <a:lnTo>
+                    <a:pt x="2578410" y="1501205"/>
+                  </a:lnTo>
+                  <a:lnTo>
+                    <a:pt x="2650033" y="1527172"/>
+                  </a:lnTo>
+                  <a:lnTo>
+                    <a:pt x="2721655" y="1552524"/>
+                  </a:lnTo>
+                  <a:lnTo>
+                    <a:pt x="2793278" y="1577277"/>
+                  </a:lnTo>
+                  <a:lnTo>
+                    <a:pt x="2864901" y="1601443"/>
+                  </a:lnTo>
+                  <a:lnTo>
+                    <a:pt x="2936523" y="1625038"/>
+                  </a:lnTo>
+                  <a:lnTo>
+                    <a:pt x="3008146" y="1648075"/>
+                  </a:lnTo>
+                  <a:lnTo>
+                    <a:pt x="3079768" y="1670567"/>
+                  </a:lnTo>
+                  <a:lnTo>
+                    <a:pt x="3151391" y="1692526"/>
+                  </a:lnTo>
+                  <a:lnTo>
+                    <a:pt x="3223013" y="1713966"/>
+                  </a:lnTo>
+                  <a:lnTo>
+                    <a:pt x="3294636" y="1734899"/>
+                  </a:lnTo>
+                  <a:lnTo>
+                    <a:pt x="3366258" y="1755337"/>
+                  </a:lnTo>
+                  <a:lnTo>
+                    <a:pt x="3437881" y="1771543"/>
+                  </a:lnTo>
+                  <a:lnTo>
+                    <a:pt x="3509503" y="1778964"/>
+                  </a:lnTo>
+                  <a:lnTo>
+                    <a:pt x="3581126" y="1786318"/>
+                  </a:lnTo>
+                  <a:lnTo>
+                    <a:pt x="3652748" y="1793606"/>
+                  </a:lnTo>
+                  <a:lnTo>
+                    <a:pt x="3724371" y="1800829"/>
+                  </a:lnTo>
+                  <a:lnTo>
+                    <a:pt x="3795993" y="1807987"/>
+                  </a:lnTo>
+                  <a:lnTo>
+                    <a:pt x="3867616" y="1815081"/>
+                  </a:lnTo>
+                  <a:lnTo>
+                    <a:pt x="3939238" y="1822111"/>
+                  </a:lnTo>
+                  <a:lnTo>
+                    <a:pt x="4010861" y="1829078"/>
+                  </a:lnTo>
+                  <a:lnTo>
+                    <a:pt x="4082483" y="1835982"/>
+                  </a:lnTo>
+                  <a:lnTo>
+                    <a:pt x="4154106" y="1842825"/>
+                  </a:lnTo>
+                  <a:lnTo>
+                    <a:pt x="4225729" y="1849606"/>
+                  </a:lnTo>
+                  <a:lnTo>
+                    <a:pt x="4297351" y="1856326"/>
+                  </a:lnTo>
+                  <a:lnTo>
+                    <a:pt x="4368974" y="1862986"/>
+                  </a:lnTo>
+                  <a:lnTo>
+                    <a:pt x="4440596" y="1869587"/>
+                  </a:lnTo>
+                  <a:lnTo>
+                    <a:pt x="4512219" y="1876128"/>
+                  </a:lnTo>
+                  <a:lnTo>
+                    <a:pt x="4583841" y="1882610"/>
+                  </a:lnTo>
+                  <a:lnTo>
+                    <a:pt x="4655464" y="1889034"/>
+                  </a:lnTo>
+                  <a:lnTo>
+                    <a:pt x="4727086" y="1895401"/>
+                  </a:lnTo>
+                  <a:lnTo>
+                    <a:pt x="4798709" y="1901711"/>
+                  </a:lnTo>
+                  <a:lnTo>
+                    <a:pt x="4870331" y="1907963"/>
+                  </a:lnTo>
+                  <a:lnTo>
+                    <a:pt x="4941954" y="1914160"/>
+                  </a:lnTo>
+                  <a:lnTo>
+                    <a:pt x="5013576" y="1920301"/>
+                  </a:lnTo>
+                  <a:lnTo>
+                    <a:pt x="5085199" y="1926388"/>
+                  </a:lnTo>
+                  <a:lnTo>
+                    <a:pt x="5156821" y="1932419"/>
+                  </a:lnTo>
+                  <a:lnTo>
+                    <a:pt x="5228444" y="1938397"/>
+                  </a:lnTo>
+                  <a:lnTo>
+                    <a:pt x="5300066" y="1944320"/>
+                  </a:lnTo>
+                  <a:lnTo>
+                    <a:pt x="5371689" y="1950191"/>
+                  </a:lnTo>
+                  <a:lnTo>
+                    <a:pt x="5443311" y="1956009"/>
+                  </a:lnTo>
+                  <a:lnTo>
+                    <a:pt x="5514934" y="1961775"/>
+                  </a:lnTo>
+                  <a:lnTo>
+                    <a:pt x="5586557" y="1967489"/>
+                  </a:lnTo>
+                  <a:lnTo>
+                    <a:pt x="5658179" y="1973152"/>
+                  </a:lnTo>
+                  <a:lnTo>
+                    <a:pt x="5729802" y="1978764"/>
+                  </a:lnTo>
+                  <a:lnTo>
+                    <a:pt x="5801424" y="1984326"/>
+                  </a:lnTo>
+                  <a:lnTo>
+                    <a:pt x="5873047" y="1989837"/>
+                  </a:lnTo>
+                  <a:lnTo>
+                    <a:pt x="5944669" y="1995300"/>
+                  </a:lnTo>
+                  <a:lnTo>
+                    <a:pt x="6016292" y="2000713"/>
+                  </a:lnTo>
+                  <a:lnTo>
+                    <a:pt x="6087914" y="2006078"/>
+                  </a:lnTo>
+                  <a:lnTo>
+                    <a:pt x="6159537" y="2011394"/>
+                  </a:lnTo>
+                  <a:lnTo>
+                    <a:pt x="6231159" y="2016663"/>
+                  </a:lnTo>
+                  <a:lnTo>
+                    <a:pt x="6302782" y="2021885"/>
+                  </a:lnTo>
+                  <a:lnTo>
+                    <a:pt x="6374404" y="2027060"/>
+                  </a:lnTo>
+                  <a:lnTo>
+                    <a:pt x="6446027" y="2032188"/>
+                  </a:lnTo>
+                  <a:lnTo>
+                    <a:pt x="6517649" y="2037271"/>
+                  </a:lnTo>
+                  <a:lnTo>
+                    <a:pt x="6589272" y="2042308"/>
+                  </a:lnTo>
+                  <a:lnTo>
+                    <a:pt x="6660894" y="2047299"/>
+                  </a:lnTo>
+                  <a:lnTo>
+                    <a:pt x="6732517" y="2052246"/>
+                  </a:lnTo>
+                  <a:lnTo>
+                    <a:pt x="6804139" y="2057149"/>
+                  </a:lnTo>
+                  <a:lnTo>
+                    <a:pt x="6875762" y="2062007"/>
+                  </a:lnTo>
+                  <a:lnTo>
+                    <a:pt x="6947385" y="2066822"/>
+                  </a:lnTo>
+                  <a:lnTo>
+                    <a:pt x="7019007" y="2071594"/>
+                  </a:lnTo>
+                  <a:lnTo>
+                    <a:pt x="7090630" y="2076323"/>
                   </a:lnTo>
                 </a:path>
               </a:pathLst>
@@ -4388,309 +4388,309 @@
           </p:nvSpPr>
           <p:spPr>
             <a:xfrm>
-              <a:off x="1172049" y="4296383"/>
-              <a:ext cx="7090630" cy="1015015"/>
+              <a:off x="1172049" y="4282401"/>
+              <a:ext cx="7090630" cy="1032012"/>
             </a:xfrm>
             <a:custGeom>
               <a:avLst/>
               <a:pathLst>
-                <a:path w="7090630" h="1015015">
+                <a:path w="7090630" h="1032012">
                   <a:moveTo>
-                    <a:pt x="7090630" y="1015015"/>
+                    <a:pt x="7090630" y="1032012"/>
                   </a:moveTo>
                   <a:lnTo>
-                    <a:pt x="7019007" y="1009118"/>
-                  </a:lnTo>
-                  <a:lnTo>
-                    <a:pt x="6947385" y="1003080"/>
-                  </a:lnTo>
-                  <a:lnTo>
-                    <a:pt x="6875762" y="996897"/>
-                  </a:lnTo>
-                  <a:lnTo>
-                    <a:pt x="6804139" y="990565"/>
-                  </a:lnTo>
-                  <a:lnTo>
-                    <a:pt x="6732517" y="984082"/>
-                  </a:lnTo>
-                  <a:lnTo>
-                    <a:pt x="6660894" y="977443"/>
-                  </a:lnTo>
-                  <a:lnTo>
-                    <a:pt x="6589272" y="970644"/>
-                  </a:lnTo>
-                  <a:lnTo>
-                    <a:pt x="6517649" y="963683"/>
-                  </a:lnTo>
-                  <a:lnTo>
-                    <a:pt x="6446027" y="956555"/>
-                  </a:lnTo>
-                  <a:lnTo>
-                    <a:pt x="6374404" y="949256"/>
-                  </a:lnTo>
-                  <a:lnTo>
-                    <a:pt x="6302782" y="941781"/>
-                  </a:lnTo>
-                  <a:lnTo>
-                    <a:pt x="6231159" y="934128"/>
-                  </a:lnTo>
-                  <a:lnTo>
-                    <a:pt x="6159537" y="926291"/>
-                  </a:lnTo>
-                  <a:lnTo>
-                    <a:pt x="6087914" y="918266"/>
-                  </a:lnTo>
-                  <a:lnTo>
-                    <a:pt x="6016292" y="910048"/>
-                  </a:lnTo>
-                  <a:lnTo>
-                    <a:pt x="5944669" y="901633"/>
-                  </a:lnTo>
-                  <a:lnTo>
-                    <a:pt x="5873047" y="893017"/>
-                  </a:lnTo>
-                  <a:lnTo>
-                    <a:pt x="5801424" y="884193"/>
-                  </a:lnTo>
-                  <a:lnTo>
-                    <a:pt x="5729802" y="875159"/>
-                  </a:lnTo>
-                  <a:lnTo>
-                    <a:pt x="5658179" y="865907"/>
-                  </a:lnTo>
-                  <a:lnTo>
-                    <a:pt x="5586557" y="856433"/>
-                  </a:lnTo>
-                  <a:lnTo>
-                    <a:pt x="5514934" y="846733"/>
-                  </a:lnTo>
-                  <a:lnTo>
-                    <a:pt x="5443311" y="836799"/>
-                  </a:lnTo>
-                  <a:lnTo>
-                    <a:pt x="5371689" y="826628"/>
-                  </a:lnTo>
-                  <a:lnTo>
-                    <a:pt x="5300066" y="816212"/>
-                  </a:lnTo>
-                  <a:lnTo>
-                    <a:pt x="5228444" y="805546"/>
-                  </a:lnTo>
-                  <a:lnTo>
-                    <a:pt x="5156821" y="794625"/>
-                  </a:lnTo>
-                  <a:lnTo>
-                    <a:pt x="5085199" y="783442"/>
-                  </a:lnTo>
-                  <a:lnTo>
-                    <a:pt x="5013576" y="771990"/>
-                  </a:lnTo>
-                  <a:lnTo>
-                    <a:pt x="4941954" y="760264"/>
-                  </a:lnTo>
-                  <a:lnTo>
-                    <a:pt x="4870331" y="748257"/>
-                  </a:lnTo>
-                  <a:lnTo>
-                    <a:pt x="4798709" y="735961"/>
-                  </a:lnTo>
-                  <a:lnTo>
-                    <a:pt x="4727086" y="723371"/>
-                  </a:lnTo>
-                  <a:lnTo>
-                    <a:pt x="4655464" y="710478"/>
-                  </a:lnTo>
-                  <a:lnTo>
-                    <a:pt x="4583841" y="697277"/>
-                  </a:lnTo>
-                  <a:lnTo>
-                    <a:pt x="4512219" y="683759"/>
-                  </a:lnTo>
-                  <a:lnTo>
-                    <a:pt x="4440596" y="669916"/>
-                  </a:lnTo>
-                  <a:lnTo>
-                    <a:pt x="4368974" y="655741"/>
-                  </a:lnTo>
-                  <a:lnTo>
-                    <a:pt x="4297351" y="641227"/>
-                  </a:lnTo>
-                  <a:lnTo>
-                    <a:pt x="4225729" y="626364"/>
-                  </a:lnTo>
-                  <a:lnTo>
-                    <a:pt x="4154106" y="611145"/>
-                  </a:lnTo>
-                  <a:lnTo>
-                    <a:pt x="4082483" y="595561"/>
-                  </a:lnTo>
-                  <a:lnTo>
-                    <a:pt x="4010861" y="579603"/>
-                  </a:lnTo>
-                  <a:lnTo>
-                    <a:pt x="3939238" y="563262"/>
-                  </a:lnTo>
-                  <a:lnTo>
-                    <a:pt x="3867616" y="546529"/>
-                  </a:lnTo>
-                  <a:lnTo>
-                    <a:pt x="3795993" y="529395"/>
-                  </a:lnTo>
-                  <a:lnTo>
-                    <a:pt x="3724371" y="511850"/>
-                  </a:lnTo>
-                  <a:lnTo>
-                    <a:pt x="3652748" y="493884"/>
-                  </a:lnTo>
-                  <a:lnTo>
-                    <a:pt x="3581126" y="475487"/>
-                  </a:lnTo>
-                  <a:lnTo>
-                    <a:pt x="3509503" y="456649"/>
-                  </a:lnTo>
-                  <a:lnTo>
-                    <a:pt x="3437881" y="437359"/>
-                  </a:lnTo>
-                  <a:lnTo>
-                    <a:pt x="3366258" y="426318"/>
-                  </a:lnTo>
-                  <a:lnTo>
-                    <a:pt x="3294636" y="418959"/>
-                  </a:lnTo>
-                  <a:lnTo>
-                    <a:pt x="3223013" y="411534"/>
-                  </a:lnTo>
-                  <a:lnTo>
-                    <a:pt x="3151391" y="404044"/>
-                  </a:lnTo>
-                  <a:lnTo>
-                    <a:pt x="3079768" y="396488"/>
-                  </a:lnTo>
-                  <a:lnTo>
-                    <a:pt x="3008146" y="388865"/>
-                  </a:lnTo>
-                  <a:lnTo>
-                    <a:pt x="2936523" y="381175"/>
-                  </a:lnTo>
-                  <a:lnTo>
-                    <a:pt x="2864901" y="373418"/>
-                  </a:lnTo>
-                  <a:lnTo>
-                    <a:pt x="2793278" y="365591"/>
-                  </a:lnTo>
-                  <a:lnTo>
-                    <a:pt x="2721655" y="357696"/>
-                  </a:lnTo>
-                  <a:lnTo>
-                    <a:pt x="2650033" y="349731"/>
-                  </a:lnTo>
-                  <a:lnTo>
-                    <a:pt x="2578410" y="341696"/>
-                  </a:lnTo>
-                  <a:lnTo>
-                    <a:pt x="2506788" y="333590"/>
-                  </a:lnTo>
-                  <a:lnTo>
-                    <a:pt x="2435165" y="325413"/>
-                  </a:lnTo>
-                  <a:lnTo>
-                    <a:pt x="2363543" y="317163"/>
-                  </a:lnTo>
-                  <a:lnTo>
-                    <a:pt x="2291920" y="308841"/>
-                  </a:lnTo>
-                  <a:lnTo>
-                    <a:pt x="2220298" y="300445"/>
-                  </a:lnTo>
-                  <a:lnTo>
-                    <a:pt x="2148675" y="291976"/>
-                  </a:lnTo>
-                  <a:lnTo>
-                    <a:pt x="2077053" y="283431"/>
-                  </a:lnTo>
-                  <a:lnTo>
-                    <a:pt x="2005430" y="274811"/>
-                  </a:lnTo>
-                  <a:lnTo>
-                    <a:pt x="1933808" y="266116"/>
-                  </a:lnTo>
-                  <a:lnTo>
-                    <a:pt x="1862185" y="257343"/>
-                  </a:lnTo>
-                  <a:lnTo>
-                    <a:pt x="1790563" y="248493"/>
-                  </a:lnTo>
-                  <a:lnTo>
-                    <a:pt x="1718940" y="239566"/>
-                  </a:lnTo>
-                  <a:lnTo>
-                    <a:pt x="1647318" y="230559"/>
-                  </a:lnTo>
-                  <a:lnTo>
-                    <a:pt x="1575695" y="221473"/>
-                  </a:lnTo>
-                  <a:lnTo>
-                    <a:pt x="1504073" y="212307"/>
-                  </a:lnTo>
-                  <a:lnTo>
-                    <a:pt x="1432450" y="203060"/>
-                  </a:lnTo>
-                  <a:lnTo>
-                    <a:pt x="1360827" y="193731"/>
-                  </a:lnTo>
-                  <a:lnTo>
-                    <a:pt x="1289205" y="184320"/>
-                  </a:lnTo>
-                  <a:lnTo>
-                    <a:pt x="1217582" y="174827"/>
-                  </a:lnTo>
-                  <a:lnTo>
-                    <a:pt x="1145960" y="165249"/>
-                  </a:lnTo>
-                  <a:lnTo>
-                    <a:pt x="1074337" y="155587"/>
-                  </a:lnTo>
-                  <a:lnTo>
-                    <a:pt x="1002715" y="145840"/>
-                  </a:lnTo>
-                  <a:lnTo>
-                    <a:pt x="931092" y="136007"/>
-                  </a:lnTo>
-                  <a:lnTo>
-                    <a:pt x="859470" y="126087"/>
-                  </a:lnTo>
-                  <a:lnTo>
-                    <a:pt x="787847" y="116080"/>
-                  </a:lnTo>
-                  <a:lnTo>
-                    <a:pt x="716225" y="105984"/>
-                  </a:lnTo>
-                  <a:lnTo>
-                    <a:pt x="644602" y="95799"/>
-                  </a:lnTo>
-                  <a:lnTo>
-                    <a:pt x="572980" y="85525"/>
-                  </a:lnTo>
-                  <a:lnTo>
-                    <a:pt x="501357" y="75160"/>
-                  </a:lnTo>
-                  <a:lnTo>
-                    <a:pt x="429735" y="64703"/>
-                  </a:lnTo>
-                  <a:lnTo>
-                    <a:pt x="358112" y="54155"/>
-                  </a:lnTo>
-                  <a:lnTo>
-                    <a:pt x="286490" y="43513"/>
-                  </a:lnTo>
-                  <a:lnTo>
-                    <a:pt x="214867" y="32778"/>
-                  </a:lnTo>
-                  <a:lnTo>
-                    <a:pt x="143245" y="21947"/>
-                  </a:lnTo>
-                  <a:lnTo>
-                    <a:pt x="71622" y="11022"/>
+                    <a:pt x="7019007" y="1026128"/>
+                  </a:lnTo>
+                  <a:lnTo>
+                    <a:pt x="6947385" y="1020101"/>
+                  </a:lnTo>
+                  <a:lnTo>
+                    <a:pt x="6875762" y="1013927"/>
+                  </a:lnTo>
+                  <a:lnTo>
+                    <a:pt x="6804139" y="1007605"/>
+                  </a:lnTo>
+                  <a:lnTo>
+                    <a:pt x="6732517" y="1001129"/>
+                  </a:lnTo>
+                  <a:lnTo>
+                    <a:pt x="6660894" y="994496"/>
+                  </a:lnTo>
+                  <a:lnTo>
+                    <a:pt x="6589272" y="987702"/>
+                  </a:lnTo>
+                  <a:lnTo>
+                    <a:pt x="6517649" y="980744"/>
+                  </a:lnTo>
+                  <a:lnTo>
+                    <a:pt x="6446027" y="973617"/>
+                  </a:lnTo>
+                  <a:lnTo>
+                    <a:pt x="6374404" y="966318"/>
+                  </a:lnTo>
+                  <a:lnTo>
+                    <a:pt x="6302782" y="958841"/>
+                  </a:lnTo>
+                  <a:lnTo>
+                    <a:pt x="6231159" y="951184"/>
+                  </a:lnTo>
+                  <a:lnTo>
+                    <a:pt x="6159537" y="943341"/>
+                  </a:lnTo>
+                  <a:lnTo>
+                    <a:pt x="6087914" y="935308"/>
+                  </a:lnTo>
+                  <a:lnTo>
+                    <a:pt x="6016292" y="927080"/>
+                  </a:lnTo>
+                  <a:lnTo>
+                    <a:pt x="5944669" y="918652"/>
+                  </a:lnTo>
+                  <a:lnTo>
+                    <a:pt x="5873047" y="910021"/>
+                  </a:lnTo>
+                  <a:lnTo>
+                    <a:pt x="5801424" y="901180"/>
+                  </a:lnTo>
+                  <a:lnTo>
+                    <a:pt x="5729802" y="892126"/>
+                  </a:lnTo>
+                  <a:lnTo>
+                    <a:pt x="5658179" y="882851"/>
+                  </a:lnTo>
+                  <a:lnTo>
+                    <a:pt x="5586557" y="873352"/>
+                  </a:lnTo>
+                  <a:lnTo>
+                    <a:pt x="5514934" y="863623"/>
+                  </a:lnTo>
+                  <a:lnTo>
+                    <a:pt x="5443311" y="853658"/>
+                  </a:lnTo>
+                  <a:lnTo>
+                    <a:pt x="5371689" y="843452"/>
+                  </a:lnTo>
+                  <a:lnTo>
+                    <a:pt x="5300066" y="832998"/>
+                  </a:lnTo>
+                  <a:lnTo>
+                    <a:pt x="5228444" y="822291"/>
+                  </a:lnTo>
+                  <a:lnTo>
+                    <a:pt x="5156821" y="811324"/>
+                  </a:lnTo>
+                  <a:lnTo>
+                    <a:pt x="5085199" y="800092"/>
+                  </a:lnTo>
+                  <a:lnTo>
+                    <a:pt x="5013576" y="788588"/>
+                  </a:lnTo>
+                  <a:lnTo>
+                    <a:pt x="4941954" y="776805"/>
+                  </a:lnTo>
+                  <a:lnTo>
+                    <a:pt x="4870331" y="764736"/>
+                  </a:lnTo>
+                  <a:lnTo>
+                    <a:pt x="4798709" y="752375"/>
+                  </a:lnTo>
+                  <a:lnTo>
+                    <a:pt x="4727086" y="739714"/>
+                  </a:lnTo>
+                  <a:lnTo>
+                    <a:pt x="4655464" y="726746"/>
+                  </a:lnTo>
+                  <a:lnTo>
+                    <a:pt x="4583841" y="713465"/>
+                  </a:lnTo>
+                  <a:lnTo>
+                    <a:pt x="4512219" y="699861"/>
+                  </a:lnTo>
+                  <a:lnTo>
+                    <a:pt x="4440596" y="685928"/>
+                  </a:lnTo>
+                  <a:lnTo>
+                    <a:pt x="4368974" y="671657"/>
+                  </a:lnTo>
+                  <a:lnTo>
+                    <a:pt x="4297351" y="657040"/>
+                  </a:lnTo>
+                  <a:lnTo>
+                    <a:pt x="4225729" y="642069"/>
+                  </a:lnTo>
+                  <a:lnTo>
+                    <a:pt x="4154106" y="626735"/>
+                  </a:lnTo>
+                  <a:lnTo>
+                    <a:pt x="4082483" y="611030"/>
+                  </a:lnTo>
+                  <a:lnTo>
+                    <a:pt x="4010861" y="594944"/>
+                  </a:lnTo>
+                  <a:lnTo>
+                    <a:pt x="3939238" y="578469"/>
+                  </a:lnTo>
+                  <a:lnTo>
+                    <a:pt x="3867616" y="561594"/>
+                  </a:lnTo>
+                  <a:lnTo>
+                    <a:pt x="3795993" y="544310"/>
+                  </a:lnTo>
+                  <a:lnTo>
+                    <a:pt x="3724371" y="526607"/>
+                  </a:lnTo>
+                  <a:lnTo>
+                    <a:pt x="3652748" y="508476"/>
+                  </a:lnTo>
+                  <a:lnTo>
+                    <a:pt x="3581126" y="489905"/>
+                  </a:lnTo>
+                  <a:lnTo>
+                    <a:pt x="3509503" y="470884"/>
+                  </a:lnTo>
+                  <a:lnTo>
+                    <a:pt x="3437881" y="451402"/>
+                  </a:lnTo>
+                  <a:lnTo>
+                    <a:pt x="3366258" y="440166"/>
+                  </a:lnTo>
+                  <a:lnTo>
+                    <a:pt x="3294636" y="432611"/>
+                  </a:lnTo>
+                  <a:lnTo>
+                    <a:pt x="3223013" y="424987"/>
+                  </a:lnTo>
+                  <a:lnTo>
+                    <a:pt x="3151391" y="417294"/>
+                  </a:lnTo>
+                  <a:lnTo>
+                    <a:pt x="3079768" y="409531"/>
+                  </a:lnTo>
+                  <a:lnTo>
+                    <a:pt x="3008146" y="401698"/>
+                  </a:lnTo>
+                  <a:lnTo>
+                    <a:pt x="2936523" y="393795"/>
+                  </a:lnTo>
+                  <a:lnTo>
+                    <a:pt x="2864901" y="385819"/>
+                  </a:lnTo>
+                  <a:lnTo>
+                    <a:pt x="2793278" y="377772"/>
+                  </a:lnTo>
+                  <a:lnTo>
+                    <a:pt x="2721655" y="369651"/>
+                  </a:lnTo>
+                  <a:lnTo>
+                    <a:pt x="2650033" y="361457"/>
+                  </a:lnTo>
+                  <a:lnTo>
+                    <a:pt x="2578410" y="353189"/>
+                  </a:lnTo>
+                  <a:lnTo>
+                    <a:pt x="2506788" y="344846"/>
+                  </a:lnTo>
+                  <a:lnTo>
+                    <a:pt x="2435165" y="336428"/>
+                  </a:lnTo>
+                  <a:lnTo>
+                    <a:pt x="2363543" y="327933"/>
+                  </a:lnTo>
+                  <a:lnTo>
+                    <a:pt x="2291920" y="319362"/>
+                  </a:lnTo>
+                  <a:lnTo>
+                    <a:pt x="2220298" y="310713"/>
+                  </a:lnTo>
+                  <a:lnTo>
+                    <a:pt x="2148675" y="301985"/>
+                  </a:lnTo>
+                  <a:lnTo>
+                    <a:pt x="2077053" y="293179"/>
+                  </a:lnTo>
+                  <a:lnTo>
+                    <a:pt x="2005430" y="284293"/>
+                  </a:lnTo>
+                  <a:lnTo>
+                    <a:pt x="1933808" y="275326"/>
+                  </a:lnTo>
+                  <a:lnTo>
+                    <a:pt x="1862185" y="266279"/>
+                  </a:lnTo>
+                  <a:lnTo>
+                    <a:pt x="1790563" y="257149"/>
+                  </a:lnTo>
+                  <a:lnTo>
+                    <a:pt x="1718940" y="247937"/>
+                  </a:lnTo>
+                  <a:lnTo>
+                    <a:pt x="1647318" y="238641"/>
+                  </a:lnTo>
+                  <a:lnTo>
+                    <a:pt x="1575695" y="229261"/>
+                  </a:lnTo>
+                  <a:lnTo>
+                    <a:pt x="1504073" y="219797"/>
+                  </a:lnTo>
+                  <a:lnTo>
+                    <a:pt x="1432450" y="210246"/>
+                  </a:lnTo>
+                  <a:lnTo>
+                    <a:pt x="1360827" y="200609"/>
+                  </a:lnTo>
+                  <a:lnTo>
+                    <a:pt x="1289205" y="190885"/>
+                  </a:lnTo>
+                  <a:lnTo>
+                    <a:pt x="1217582" y="181073"/>
+                  </a:lnTo>
+                  <a:lnTo>
+                    <a:pt x="1145960" y="171172"/>
+                  </a:lnTo>
+                  <a:lnTo>
+                    <a:pt x="1074337" y="161182"/>
+                  </a:lnTo>
+                  <a:lnTo>
+                    <a:pt x="1002715" y="151101"/>
+                  </a:lnTo>
+                  <a:lnTo>
+                    <a:pt x="931092" y="140929"/>
+                  </a:lnTo>
+                  <a:lnTo>
+                    <a:pt x="859470" y="130664"/>
+                  </a:lnTo>
+                  <a:lnTo>
+                    <a:pt x="787847" y="120307"/>
+                  </a:lnTo>
+                  <a:lnTo>
+                    <a:pt x="716225" y="109856"/>
+                  </a:lnTo>
+                  <a:lnTo>
+                    <a:pt x="644602" y="99311"/>
+                  </a:lnTo>
+                  <a:lnTo>
+                    <a:pt x="572980" y="88670"/>
+                  </a:lnTo>
+                  <a:lnTo>
+                    <a:pt x="501357" y="77932"/>
+                  </a:lnTo>
+                  <a:lnTo>
+                    <a:pt x="429735" y="67098"/>
+                  </a:lnTo>
+                  <a:lnTo>
+                    <a:pt x="358112" y="56165"/>
+                  </a:lnTo>
+                  <a:lnTo>
+                    <a:pt x="286490" y="45133"/>
+                  </a:lnTo>
+                  <a:lnTo>
+                    <a:pt x="214867" y="34002"/>
+                  </a:lnTo>
+                  <a:lnTo>
+                    <a:pt x="143245" y="22770"/>
+                  </a:lnTo>
+                  <a:lnTo>
+                    <a:pt x="71622" y="11436"/>
                   </a:lnTo>
                   <a:lnTo>
                     <a:pt x="0" y="0"/>
@@ -4713,312 +4713,312 @@
           </p:nvSpPr>
           <p:spPr>
             <a:xfrm>
-              <a:off x="1172049" y="3757446"/>
-              <a:ext cx="7090630" cy="1439292"/>
+              <a:off x="1172049" y="3737085"/>
+              <a:ext cx="7090630" cy="1463988"/>
             </a:xfrm>
             <a:custGeom>
               <a:avLst/>
               <a:pathLst>
-                <a:path w="7090630" h="1439292">
+                <a:path w="7090630" h="1463988">
                   <a:moveTo>
                     <a:pt x="0" y="0"/>
                   </a:moveTo>
                   <a:lnTo>
-                    <a:pt x="71622" y="28995"/>
-                  </a:lnTo>
-                  <a:lnTo>
-                    <a:pt x="143245" y="57523"/>
-                  </a:lnTo>
-                  <a:lnTo>
-                    <a:pt x="214867" y="85592"/>
-                  </a:lnTo>
-                  <a:lnTo>
-                    <a:pt x="286490" y="113208"/>
-                  </a:lnTo>
-                  <a:lnTo>
-                    <a:pt x="358112" y="140380"/>
-                  </a:lnTo>
-                  <a:lnTo>
-                    <a:pt x="429735" y="167114"/>
-                  </a:lnTo>
-                  <a:lnTo>
-                    <a:pt x="501357" y="193417"/>
-                  </a:lnTo>
-                  <a:lnTo>
-                    <a:pt x="572980" y="219296"/>
-                  </a:lnTo>
-                  <a:lnTo>
-                    <a:pt x="644602" y="244759"/>
-                  </a:lnTo>
-                  <a:lnTo>
-                    <a:pt x="716225" y="269811"/>
-                  </a:lnTo>
-                  <a:lnTo>
-                    <a:pt x="787847" y="294460"/>
-                  </a:lnTo>
-                  <a:lnTo>
-                    <a:pt x="859470" y="318711"/>
-                  </a:lnTo>
-                  <a:lnTo>
-                    <a:pt x="931092" y="342572"/>
-                  </a:lnTo>
-                  <a:lnTo>
-                    <a:pt x="1002715" y="366049"/>
-                  </a:lnTo>
-                  <a:lnTo>
-                    <a:pt x="1074337" y="389147"/>
-                  </a:lnTo>
-                  <a:lnTo>
-                    <a:pt x="1145960" y="411873"/>
-                  </a:lnTo>
-                  <a:lnTo>
-                    <a:pt x="1217582" y="434233"/>
-                  </a:lnTo>
-                  <a:lnTo>
-                    <a:pt x="1289205" y="456233"/>
-                  </a:lnTo>
-                  <a:lnTo>
-                    <a:pt x="1360827" y="477878"/>
-                  </a:lnTo>
-                  <a:lnTo>
-                    <a:pt x="1432450" y="499175"/>
-                  </a:lnTo>
-                  <a:lnTo>
-                    <a:pt x="1504073" y="520128"/>
-                  </a:lnTo>
-                  <a:lnTo>
-                    <a:pt x="1575695" y="540744"/>
-                  </a:lnTo>
-                  <a:lnTo>
-                    <a:pt x="1647318" y="561028"/>
-                  </a:lnTo>
-                  <a:lnTo>
-                    <a:pt x="1718940" y="580985"/>
-                  </a:lnTo>
-                  <a:lnTo>
-                    <a:pt x="1790563" y="600621"/>
-                  </a:lnTo>
-                  <a:lnTo>
-                    <a:pt x="1862185" y="619940"/>
-                  </a:lnTo>
-                  <a:lnTo>
-                    <a:pt x="1933808" y="638948"/>
-                  </a:lnTo>
-                  <a:lnTo>
-                    <a:pt x="2005430" y="657650"/>
-                  </a:lnTo>
-                  <a:lnTo>
-                    <a:pt x="2077053" y="676050"/>
-                  </a:lnTo>
-                  <a:lnTo>
-                    <a:pt x="2148675" y="694154"/>
-                  </a:lnTo>
-                  <a:lnTo>
-                    <a:pt x="2220298" y="711967"/>
-                  </a:lnTo>
-                  <a:lnTo>
-                    <a:pt x="2291920" y="729492"/>
-                  </a:lnTo>
-                  <a:lnTo>
-                    <a:pt x="2363543" y="746735"/>
-                  </a:lnTo>
-                  <a:lnTo>
-                    <a:pt x="2435165" y="763700"/>
-                  </a:lnTo>
-                  <a:lnTo>
-                    <a:pt x="2506788" y="780392"/>
-                  </a:lnTo>
-                  <a:lnTo>
-                    <a:pt x="2578410" y="796815"/>
-                  </a:lnTo>
-                  <a:lnTo>
-                    <a:pt x="2650033" y="812974"/>
-                  </a:lnTo>
-                  <a:lnTo>
-                    <a:pt x="2721655" y="828872"/>
-                  </a:lnTo>
-                  <a:lnTo>
-                    <a:pt x="2793278" y="844514"/>
-                  </a:lnTo>
-                  <a:lnTo>
-                    <a:pt x="2864901" y="859904"/>
-                  </a:lnTo>
-                  <a:lnTo>
-                    <a:pt x="2936523" y="875046"/>
-                  </a:lnTo>
-                  <a:lnTo>
-                    <a:pt x="3008146" y="889944"/>
-                  </a:lnTo>
-                  <a:lnTo>
-                    <a:pt x="3079768" y="904602"/>
-                  </a:lnTo>
-                  <a:lnTo>
-                    <a:pt x="3151391" y="919024"/>
-                  </a:lnTo>
-                  <a:lnTo>
-                    <a:pt x="3223013" y="933214"/>
-                  </a:lnTo>
-                  <a:lnTo>
-                    <a:pt x="3294636" y="947175"/>
-                  </a:lnTo>
-                  <a:lnTo>
-                    <a:pt x="3366258" y="960911"/>
-                  </a:lnTo>
-                  <a:lnTo>
-                    <a:pt x="3437881" y="974426"/>
-                  </a:lnTo>
-                  <a:lnTo>
-                    <a:pt x="3509503" y="987723"/>
-                  </a:lnTo>
-                  <a:lnTo>
-                    <a:pt x="3581126" y="1000806"/>
-                  </a:lnTo>
-                  <a:lnTo>
-                    <a:pt x="3652748" y="1013678"/>
-                  </a:lnTo>
-                  <a:lnTo>
-                    <a:pt x="3724371" y="1026343"/>
-                  </a:lnTo>
-                  <a:lnTo>
-                    <a:pt x="3795993" y="1038803"/>
-                  </a:lnTo>
-                  <a:lnTo>
-                    <a:pt x="3867616" y="1051063"/>
-                  </a:lnTo>
-                  <a:lnTo>
-                    <a:pt x="3939238" y="1063126"/>
-                  </a:lnTo>
-                  <a:lnTo>
-                    <a:pt x="4010861" y="1074994"/>
-                  </a:lnTo>
-                  <a:lnTo>
-                    <a:pt x="4082483" y="1086671"/>
-                  </a:lnTo>
-                  <a:lnTo>
-                    <a:pt x="4154106" y="1098160"/>
-                  </a:lnTo>
-                  <a:lnTo>
-                    <a:pt x="4225729" y="1109463"/>
-                  </a:lnTo>
-                  <a:lnTo>
-                    <a:pt x="4297351" y="1120585"/>
-                  </a:lnTo>
-                  <a:lnTo>
-                    <a:pt x="4368974" y="1131527"/>
-                  </a:lnTo>
-                  <a:lnTo>
-                    <a:pt x="4440596" y="1142293"/>
-                  </a:lnTo>
-                  <a:lnTo>
-                    <a:pt x="4512219" y="1152886"/>
-                  </a:lnTo>
-                  <a:lnTo>
-                    <a:pt x="4583841" y="1163308"/>
-                  </a:lnTo>
-                  <a:lnTo>
-                    <a:pt x="4655464" y="1173562"/>
-                  </a:lnTo>
-                  <a:lnTo>
-                    <a:pt x="4727086" y="1183651"/>
-                  </a:lnTo>
-                  <a:lnTo>
-                    <a:pt x="4798709" y="1193578"/>
-                  </a:lnTo>
-                  <a:lnTo>
-                    <a:pt x="4870331" y="1203344"/>
-                  </a:lnTo>
-                  <a:lnTo>
-                    <a:pt x="4941954" y="1212953"/>
-                  </a:lnTo>
-                  <a:lnTo>
-                    <a:pt x="5013576" y="1222408"/>
-                  </a:lnTo>
-                  <a:lnTo>
-                    <a:pt x="5085199" y="1231710"/>
-                  </a:lnTo>
-                  <a:lnTo>
-                    <a:pt x="5156821" y="1240862"/>
-                  </a:lnTo>
-                  <a:lnTo>
-                    <a:pt x="5228444" y="1249867"/>
-                  </a:lnTo>
-                  <a:lnTo>
-                    <a:pt x="5300066" y="1258726"/>
-                  </a:lnTo>
-                  <a:lnTo>
-                    <a:pt x="5371689" y="1267443"/>
-                  </a:lnTo>
-                  <a:lnTo>
-                    <a:pt x="5443311" y="1276020"/>
-                  </a:lnTo>
-                  <a:lnTo>
-                    <a:pt x="5514934" y="1284458"/>
-                  </a:lnTo>
-                  <a:lnTo>
-                    <a:pt x="5586557" y="1292760"/>
-                  </a:lnTo>
-                  <a:lnTo>
-                    <a:pt x="5658179" y="1300929"/>
-                  </a:lnTo>
-                  <a:lnTo>
-                    <a:pt x="5729802" y="1308966"/>
-                  </a:lnTo>
-                  <a:lnTo>
-                    <a:pt x="5801424" y="1316874"/>
-                  </a:lnTo>
-                  <a:lnTo>
-                    <a:pt x="5873047" y="1324654"/>
-                  </a:lnTo>
-                  <a:lnTo>
-                    <a:pt x="5944669" y="1332309"/>
-                  </a:lnTo>
-                  <a:lnTo>
-                    <a:pt x="6016292" y="1339840"/>
-                  </a:lnTo>
-                  <a:lnTo>
-                    <a:pt x="6087914" y="1347250"/>
-                  </a:lnTo>
-                  <a:lnTo>
-                    <a:pt x="6159537" y="1354541"/>
-                  </a:lnTo>
-                  <a:lnTo>
-                    <a:pt x="6231159" y="1361714"/>
-                  </a:lnTo>
-                  <a:lnTo>
-                    <a:pt x="6302782" y="1368772"/>
-                  </a:lnTo>
-                  <a:lnTo>
-                    <a:pt x="6374404" y="1375716"/>
-                  </a:lnTo>
-                  <a:lnTo>
-                    <a:pt x="6446027" y="1382548"/>
-                  </a:lnTo>
-                  <a:lnTo>
-                    <a:pt x="6517649" y="1389270"/>
-                  </a:lnTo>
-                  <a:lnTo>
-                    <a:pt x="6589272" y="1395884"/>
-                  </a:lnTo>
-                  <a:lnTo>
-                    <a:pt x="6660894" y="1402391"/>
-                  </a:lnTo>
-                  <a:lnTo>
-                    <a:pt x="6732517" y="1408794"/>
-                  </a:lnTo>
-                  <a:lnTo>
-                    <a:pt x="6804139" y="1415093"/>
-                  </a:lnTo>
-                  <a:lnTo>
-                    <a:pt x="6875762" y="1421291"/>
-                  </a:lnTo>
-                  <a:lnTo>
-                    <a:pt x="6947385" y="1427389"/>
-                  </a:lnTo>
-                  <a:lnTo>
-                    <a:pt x="7019007" y="1433389"/>
-                  </a:lnTo>
-                  <a:lnTo>
-                    <a:pt x="7090630" y="1439292"/>
+                    <a:pt x="71622" y="29745"/>
+                  </a:lnTo>
+                  <a:lnTo>
+                    <a:pt x="143245" y="59005"/>
+                  </a:lnTo>
+                  <a:lnTo>
+                    <a:pt x="214867" y="87786"/>
+                  </a:lnTo>
+                  <a:lnTo>
+                    <a:pt x="286490" y="116097"/>
+                  </a:lnTo>
+                  <a:lnTo>
+                    <a:pt x="358112" y="143946"/>
+                  </a:lnTo>
+                  <a:lnTo>
+                    <a:pt x="429735" y="171339"/>
+                  </a:lnTo>
+                  <a:lnTo>
+                    <a:pt x="501357" y="198285"/>
+                  </a:lnTo>
+                  <a:lnTo>
+                    <a:pt x="572980" y="224790"/>
+                  </a:lnTo>
+                  <a:lnTo>
+                    <a:pt x="644602" y="250862"/>
+                  </a:lnTo>
+                  <a:lnTo>
+                    <a:pt x="716225" y="276508"/>
+                  </a:lnTo>
+                  <a:lnTo>
+                    <a:pt x="787847" y="301735"/>
+                  </a:lnTo>
+                  <a:lnTo>
+                    <a:pt x="859470" y="326550"/>
+                  </a:lnTo>
+                  <a:lnTo>
+                    <a:pt x="931092" y="350959"/>
+                  </a:lnTo>
+                  <a:lnTo>
+                    <a:pt x="1002715" y="374969"/>
+                  </a:lnTo>
+                  <a:lnTo>
+                    <a:pt x="1074337" y="398587"/>
+                  </a:lnTo>
+                  <a:lnTo>
+                    <a:pt x="1145960" y="421819"/>
+                  </a:lnTo>
+                  <a:lnTo>
+                    <a:pt x="1217582" y="444671"/>
+                  </a:lnTo>
+                  <a:lnTo>
+                    <a:pt x="1289205" y="467150"/>
+                  </a:lnTo>
+                  <a:lnTo>
+                    <a:pt x="1360827" y="489262"/>
+                  </a:lnTo>
+                  <a:lnTo>
+                    <a:pt x="1432450" y="511012"/>
+                  </a:lnTo>
+                  <a:lnTo>
+                    <a:pt x="1504073" y="532406"/>
+                  </a:lnTo>
+                  <a:lnTo>
+                    <a:pt x="1575695" y="553451"/>
+                  </a:lnTo>
+                  <a:lnTo>
+                    <a:pt x="1647318" y="574152"/>
+                  </a:lnTo>
+                  <a:lnTo>
+                    <a:pt x="1718940" y="594515"/>
+                  </a:lnTo>
+                  <a:lnTo>
+                    <a:pt x="1790563" y="614545"/>
+                  </a:lnTo>
+                  <a:lnTo>
+                    <a:pt x="1862185" y="634248"/>
+                  </a:lnTo>
+                  <a:lnTo>
+                    <a:pt x="1933808" y="653628"/>
+                  </a:lnTo>
+                  <a:lnTo>
+                    <a:pt x="2005430" y="672692"/>
+                  </a:lnTo>
+                  <a:lnTo>
+                    <a:pt x="2077053" y="691445"/>
+                  </a:lnTo>
+                  <a:lnTo>
+                    <a:pt x="2148675" y="709891"/>
+                  </a:lnTo>
+                  <a:lnTo>
+                    <a:pt x="2220298" y="728035"/>
+                  </a:lnTo>
+                  <a:lnTo>
+                    <a:pt x="2291920" y="745883"/>
+                  </a:lnTo>
+                  <a:lnTo>
+                    <a:pt x="2363543" y="763439"/>
+                  </a:lnTo>
+                  <a:lnTo>
+                    <a:pt x="2435165" y="780709"/>
+                  </a:lnTo>
+                  <a:lnTo>
+                    <a:pt x="2506788" y="797696"/>
+                  </a:lnTo>
+                  <a:lnTo>
+                    <a:pt x="2578410" y="814405"/>
+                  </a:lnTo>
+                  <a:lnTo>
+                    <a:pt x="2650033" y="830842"/>
+                  </a:lnTo>
+                  <a:lnTo>
+                    <a:pt x="2721655" y="847010"/>
+                  </a:lnTo>
+                  <a:lnTo>
+                    <a:pt x="2793278" y="862913"/>
+                  </a:lnTo>
+                  <a:lnTo>
+                    <a:pt x="2864901" y="878557"/>
+                  </a:lnTo>
+                  <a:lnTo>
+                    <a:pt x="2936523" y="893945"/>
+                  </a:lnTo>
+                  <a:lnTo>
+                    <a:pt x="3008146" y="909082"/>
+                  </a:lnTo>
+                  <a:lnTo>
+                    <a:pt x="3079768" y="923971"/>
+                  </a:lnTo>
+                  <a:lnTo>
+                    <a:pt x="3151391" y="938617"/>
+                  </a:lnTo>
+                  <a:lnTo>
+                    <a:pt x="3223013" y="953023"/>
+                  </a:lnTo>
+                  <a:lnTo>
+                    <a:pt x="3294636" y="967194"/>
+                  </a:lnTo>
+                  <a:lnTo>
+                    <a:pt x="3366258" y="981134"/>
+                  </a:lnTo>
+                  <a:lnTo>
+                    <a:pt x="3437881" y="994846"/>
+                  </a:lnTo>
+                  <a:lnTo>
+                    <a:pt x="3509503" y="1008333"/>
+                  </a:lnTo>
+                  <a:lnTo>
+                    <a:pt x="3581126" y="1021600"/>
+                  </a:lnTo>
+                  <a:lnTo>
+                    <a:pt x="3652748" y="1034651"/>
+                  </a:lnTo>
+                  <a:lnTo>
+                    <a:pt x="3724371" y="1047488"/>
+                  </a:lnTo>
+                  <a:lnTo>
+                    <a:pt x="3795993" y="1060115"/>
+                  </a:lnTo>
+                  <a:lnTo>
+                    <a:pt x="3867616" y="1072536"/>
+                  </a:lnTo>
+                  <a:lnTo>
+                    <a:pt x="3939238" y="1084754"/>
+                  </a:lnTo>
+                  <a:lnTo>
+                    <a:pt x="4010861" y="1096772"/>
+                  </a:lnTo>
+                  <a:lnTo>
+                    <a:pt x="4082483" y="1108594"/>
+                  </a:lnTo>
+                  <a:lnTo>
+                    <a:pt x="4154106" y="1120223"/>
+                  </a:lnTo>
+                  <a:lnTo>
+                    <a:pt x="4225729" y="1131662"/>
+                  </a:lnTo>
+                  <a:lnTo>
+                    <a:pt x="4297351" y="1142914"/>
+                  </a:lnTo>
+                  <a:lnTo>
+                    <a:pt x="4368974" y="1153981"/>
+                  </a:lnTo>
+                  <a:lnTo>
+                    <a:pt x="4440596" y="1164868"/>
+                  </a:lnTo>
+                  <a:lnTo>
+                    <a:pt x="4512219" y="1175577"/>
+                  </a:lnTo>
+                  <a:lnTo>
+                    <a:pt x="4583841" y="1186111"/>
+                  </a:lnTo>
+                  <a:lnTo>
+                    <a:pt x="4655464" y="1196473"/>
+                  </a:lnTo>
+                  <a:lnTo>
+                    <a:pt x="4727086" y="1206666"/>
+                  </a:lnTo>
+                  <a:lnTo>
+                    <a:pt x="4798709" y="1216692"/>
+                  </a:lnTo>
+                  <a:lnTo>
+                    <a:pt x="4870331" y="1226554"/>
+                  </a:lnTo>
+                  <a:lnTo>
+                    <a:pt x="4941954" y="1236255"/>
+                  </a:lnTo>
+                  <a:lnTo>
+                    <a:pt x="5013576" y="1245797"/>
+                  </a:lnTo>
+                  <a:lnTo>
+                    <a:pt x="5085199" y="1255184"/>
+                  </a:lnTo>
+                  <a:lnTo>
+                    <a:pt x="5156821" y="1264417"/>
+                  </a:lnTo>
+                  <a:lnTo>
+                    <a:pt x="5228444" y="1273499"/>
+                  </a:lnTo>
+                  <a:lnTo>
+                    <a:pt x="5300066" y="1282433"/>
+                  </a:lnTo>
+                  <a:lnTo>
+                    <a:pt x="5371689" y="1291221"/>
+                  </a:lnTo>
+                  <a:lnTo>
+                    <a:pt x="5443311" y="1299865"/>
+                  </a:lnTo>
+                  <a:lnTo>
+                    <a:pt x="5514934" y="1308368"/>
+                  </a:lnTo>
+                  <a:lnTo>
+                    <a:pt x="5586557" y="1316732"/>
+                  </a:lnTo>
+                  <a:lnTo>
+                    <a:pt x="5658179" y="1324959"/>
+                  </a:lnTo>
+                  <a:lnTo>
+                    <a:pt x="5729802" y="1333052"/>
+                  </a:lnTo>
+                  <a:lnTo>
+                    <a:pt x="5801424" y="1341012"/>
+                  </a:lnTo>
+                  <a:lnTo>
+                    <a:pt x="5873047" y="1348843"/>
+                  </a:lnTo>
+                  <a:lnTo>
+                    <a:pt x="5944669" y="1356545"/>
+                  </a:lnTo>
+                  <a:lnTo>
+                    <a:pt x="6016292" y="1364122"/>
+                  </a:lnTo>
+                  <a:lnTo>
+                    <a:pt x="6087914" y="1371575"/>
+                  </a:lnTo>
+                  <a:lnTo>
+                    <a:pt x="6159537" y="1378906"/>
+                  </a:lnTo>
+                  <a:lnTo>
+                    <a:pt x="6231159" y="1386117"/>
+                  </a:lnTo>
+                  <a:lnTo>
+                    <a:pt x="6302782" y="1393210"/>
+                  </a:lnTo>
+                  <a:lnTo>
+                    <a:pt x="6374404" y="1400188"/>
+                  </a:lnTo>
+                  <a:lnTo>
+                    <a:pt x="6446027" y="1407051"/>
+                  </a:lnTo>
+                  <a:lnTo>
+                    <a:pt x="6517649" y="1413802"/>
+                  </a:lnTo>
+                  <a:lnTo>
+                    <a:pt x="6589272" y="1420443"/>
+                  </a:lnTo>
+                  <a:lnTo>
+                    <a:pt x="6660894" y="1426976"/>
+                  </a:lnTo>
+                  <a:lnTo>
+                    <a:pt x="6732517" y="1433401"/>
+                  </a:lnTo>
+                  <a:lnTo>
+                    <a:pt x="6804139" y="1439722"/>
+                  </a:lnTo>
+                  <a:lnTo>
+                    <a:pt x="6875762" y="1445939"/>
+                  </a:lnTo>
+                  <a:lnTo>
+                    <a:pt x="6947385" y="1452055"/>
+                  </a:lnTo>
+                  <a:lnTo>
+                    <a:pt x="7019007" y="1458071"/>
+                  </a:lnTo>
+                  <a:lnTo>
+                    <a:pt x="7090630" y="1463988"/>
                   </a:lnTo>
                 </a:path>
               </a:pathLst>
@@ -5902,7 +5902,7 @@
                   <a:latin typeface="Helvetica"/>
                   <a:cs typeface="Helvetica"/>
                 </a:rPr>
-                <a:t>subHR per 10 % decline: 1.22 (1.11-1.33), p_Bonf = &lt;0.001 (n = 6)  |  per IQR decline (Δ = 29.3 %): 1.77 (1.36-2.30)  |  IQR: [-14.6, 14.7] %</a:t>
+                <a:t>subHR per 10 % decline: 1.22 (1.11-1.33), p_Bonf = &lt;0.001 (n = 6)  |  per IQR decline (Δ = 29.3 %): 1.79 (1.37-2.32)  |  IQR: [-14.6, 14.7] %</a:t>
               </a:r>
             </a:p>
           </p:txBody>
